--- a/slides/antenna_animation.pptx
+++ b/slides/antenna_animation.pptx
@@ -2,7 +2,7 @@
 <file path=ppt/presentation.xml><?xml version="1.0" encoding="utf-8"?>
 <p:presentation xmlns:a="http://schemas.openxmlformats.org/drawingml/2006/main" xmlns:r="http://schemas.openxmlformats.org/officeDocument/2006/relationships" xmlns:p="http://schemas.openxmlformats.org/presentationml/2006/main" saveSubsetFonts="1">
   <p:sldMasterIdLst>
-    <p:sldMasterId id="2147483648" r:id="rId1"/>
+    <p:sldMasterId id="2147483756" r:id="rId1"/>
   </p:sldMasterIdLst>
   <p:sldIdLst>
     <p:sldId id="266" r:id="rId2"/>
@@ -17,13 +17,13 @@
     <p:sldId id="265" r:id="rId11"/>
     <p:sldId id="267" r:id="rId12"/>
   </p:sldIdLst>
-  <p:sldSz cx="12192000" cy="6858000"/>
+  <p:sldSz cx="6126163" cy="4937125"/>
   <p:notesSz cx="6858000" cy="9144000"/>
   <p:defaultTextStyle>
     <a:defPPr>
-      <a:defRPr lang="en-DE"/>
+      <a:defRPr lang="en-US"/>
     </a:defPPr>
-    <a:lvl1pPr marL="0" algn="l" defTabSz="914400" rtl="0" eaLnBrk="1" latinLnBrk="0" hangingPunct="1">
+    <a:lvl1pPr marL="0" algn="l" defTabSz="457200" rtl="0" eaLnBrk="1" latinLnBrk="0" hangingPunct="1">
       <a:defRPr sz="1800" kern="1200">
         <a:solidFill>
           <a:schemeClr val="tx1"/>
@@ -33,7 +33,7 @@
         <a:cs typeface="+mn-cs"/>
       </a:defRPr>
     </a:lvl1pPr>
-    <a:lvl2pPr marL="457200" algn="l" defTabSz="914400" rtl="0" eaLnBrk="1" latinLnBrk="0" hangingPunct="1">
+    <a:lvl2pPr marL="457200" algn="l" defTabSz="457200" rtl="0" eaLnBrk="1" latinLnBrk="0" hangingPunct="1">
       <a:defRPr sz="1800" kern="1200">
         <a:solidFill>
           <a:schemeClr val="tx1"/>
@@ -43,7 +43,7 @@
         <a:cs typeface="+mn-cs"/>
       </a:defRPr>
     </a:lvl2pPr>
-    <a:lvl3pPr marL="914400" algn="l" defTabSz="914400" rtl="0" eaLnBrk="1" latinLnBrk="0" hangingPunct="1">
+    <a:lvl3pPr marL="914400" algn="l" defTabSz="457200" rtl="0" eaLnBrk="1" latinLnBrk="0" hangingPunct="1">
       <a:defRPr sz="1800" kern="1200">
         <a:solidFill>
           <a:schemeClr val="tx1"/>
@@ -53,7 +53,7 @@
         <a:cs typeface="+mn-cs"/>
       </a:defRPr>
     </a:lvl3pPr>
-    <a:lvl4pPr marL="1371600" algn="l" defTabSz="914400" rtl="0" eaLnBrk="1" latinLnBrk="0" hangingPunct="1">
+    <a:lvl4pPr marL="1371600" algn="l" defTabSz="457200" rtl="0" eaLnBrk="1" latinLnBrk="0" hangingPunct="1">
       <a:defRPr sz="1800" kern="1200">
         <a:solidFill>
           <a:schemeClr val="tx1"/>
@@ -63,7 +63,7 @@
         <a:cs typeface="+mn-cs"/>
       </a:defRPr>
     </a:lvl4pPr>
-    <a:lvl5pPr marL="1828800" algn="l" defTabSz="914400" rtl="0" eaLnBrk="1" latinLnBrk="0" hangingPunct="1">
+    <a:lvl5pPr marL="1828800" algn="l" defTabSz="457200" rtl="0" eaLnBrk="1" latinLnBrk="0" hangingPunct="1">
       <a:defRPr sz="1800" kern="1200">
         <a:solidFill>
           <a:schemeClr val="tx1"/>
@@ -73,7 +73,7 @@
         <a:cs typeface="+mn-cs"/>
       </a:defRPr>
     </a:lvl5pPr>
-    <a:lvl6pPr marL="2286000" algn="l" defTabSz="914400" rtl="0" eaLnBrk="1" latinLnBrk="0" hangingPunct="1">
+    <a:lvl6pPr marL="2286000" algn="l" defTabSz="457200" rtl="0" eaLnBrk="1" latinLnBrk="0" hangingPunct="1">
       <a:defRPr sz="1800" kern="1200">
         <a:solidFill>
           <a:schemeClr val="tx1"/>
@@ -83,7 +83,7 @@
         <a:cs typeface="+mn-cs"/>
       </a:defRPr>
     </a:lvl6pPr>
-    <a:lvl7pPr marL="2743200" algn="l" defTabSz="914400" rtl="0" eaLnBrk="1" latinLnBrk="0" hangingPunct="1">
+    <a:lvl7pPr marL="2743200" algn="l" defTabSz="457200" rtl="0" eaLnBrk="1" latinLnBrk="0" hangingPunct="1">
       <a:defRPr sz="1800" kern="1200">
         <a:solidFill>
           <a:schemeClr val="tx1"/>
@@ -93,7 +93,7 @@
         <a:cs typeface="+mn-cs"/>
       </a:defRPr>
     </a:lvl7pPr>
-    <a:lvl8pPr marL="3200400" algn="l" defTabSz="914400" rtl="0" eaLnBrk="1" latinLnBrk="0" hangingPunct="1">
+    <a:lvl8pPr marL="3200400" algn="l" defTabSz="457200" rtl="0" eaLnBrk="1" latinLnBrk="0" hangingPunct="1">
       <a:defRPr sz="1800" kern="1200">
         <a:solidFill>
           <a:schemeClr val="tx1"/>
@@ -103,7 +103,7 @@
         <a:cs typeface="+mn-cs"/>
       </a:defRPr>
     </a:lvl8pPr>
-    <a:lvl9pPr marL="3657600" algn="l" defTabSz="914400" rtl="0" eaLnBrk="1" latinLnBrk="0" hangingPunct="1">
+    <a:lvl9pPr marL="3657600" algn="l" defTabSz="457200" rtl="0" eaLnBrk="1" latinLnBrk="0" hangingPunct="1">
       <a:defRPr sz="1800" kern="1200">
         <a:solidFill>
           <a:schemeClr val="tx1"/>
@@ -114,6 +114,11 @@
       </a:defRPr>
     </a:lvl9pPr>
   </p:defaultTextStyle>
+  <p:extLst>
+    <p:ext uri="{EFAFB233-063F-42B5-8137-9DF3F51BA10A}">
+      <p15:sldGuideLst xmlns:p15="http://schemas.microsoft.com/office/powerpoint/2012/main"/>
+    </p:ext>
+  </p:extLst>
 </p:presentation>
 </file>
 
@@ -136,13 +141,7 @@
       </p:grpSpPr>
       <p:sp>
         <p:nvSpPr>
-          <p:cNvPr id="2" name="Title 1">
-            <a:extLst>
-              <a:ext uri="{FF2B5EF4-FFF2-40B4-BE49-F238E27FC236}">
-                <a16:creationId xmlns:a16="http://schemas.microsoft.com/office/drawing/2014/main" id="{EFDE14EB-2B52-EA63-A9BC-65A693CF7E74}"/>
-              </a:ext>
-            </a:extLst>
-          </p:cNvPr>
+          <p:cNvPr id="2" name="Title 1"/>
           <p:cNvSpPr>
             <a:spLocks noGrp="1"/>
           </p:cNvSpPr>
@@ -152,15 +151,15 @@
         </p:nvSpPr>
         <p:spPr>
           <a:xfrm>
-            <a:off x="1524000" y="1122363"/>
-            <a:ext cx="9144000" cy="2387600"/>
+            <a:off x="459462" y="807997"/>
+            <a:ext cx="5207239" cy="1718851"/>
           </a:xfrm>
         </p:spPr>
         <p:txBody>
           <a:bodyPr anchor="b"/>
           <a:lstStyle>
             <a:lvl1pPr algn="ctr">
-              <a:defRPr sz="6000"/>
+              <a:defRPr sz="4020"/>
             </a:lvl1pPr>
           </a:lstStyle>
           <a:p>
@@ -168,19 +167,13 @@
               <a:rPr lang="en-US"/>
               <a:t>Click to edit Master title style</a:t>
             </a:r>
-            <a:endParaRPr lang="en-DE"/>
-          </a:p>
-        </p:txBody>
-      </p:sp>
-      <p:sp>
-        <p:nvSpPr>
-          <p:cNvPr id="3" name="Subtitle 2">
-            <a:extLst>
-              <a:ext uri="{FF2B5EF4-FFF2-40B4-BE49-F238E27FC236}">
-                <a16:creationId xmlns:a16="http://schemas.microsoft.com/office/drawing/2014/main" id="{089CA250-1F7F-5662-40FC-CC1BEADD893B}"/>
-              </a:ext>
-            </a:extLst>
-          </p:cNvPr>
+            <a:endParaRPr lang="en-US" dirty="0"/>
+          </a:p>
+        </p:txBody>
+      </p:sp>
+      <p:sp>
+        <p:nvSpPr>
+          <p:cNvPr id="3" name="Subtitle 2"/>
           <p:cNvSpPr>
             <a:spLocks noGrp="1"/>
           </p:cNvSpPr>
@@ -190,8 +183,8 @@
         </p:nvSpPr>
         <p:spPr>
           <a:xfrm>
-            <a:off x="1524000" y="3602038"/>
-            <a:ext cx="9144000" cy="1655762"/>
+            <a:off x="765771" y="2593134"/>
+            <a:ext cx="4594622" cy="1191995"/>
           </a:xfrm>
         </p:spPr>
         <p:txBody>
@@ -199,39 +192,39 @@
           <a:lstStyle>
             <a:lvl1pPr marL="0" indent="0" algn="ctr">
               <a:buNone/>
-              <a:defRPr sz="2400"/>
+              <a:defRPr sz="1608"/>
             </a:lvl1pPr>
-            <a:lvl2pPr marL="457200" indent="0" algn="ctr">
-              <a:buNone/>
-              <a:defRPr sz="2000"/>
+            <a:lvl2pPr marL="306324" indent="0" algn="ctr">
+              <a:buNone/>
+              <a:defRPr sz="1340"/>
             </a:lvl2pPr>
-            <a:lvl3pPr marL="914400" indent="0" algn="ctr">
-              <a:buNone/>
-              <a:defRPr sz="1800"/>
+            <a:lvl3pPr marL="612648" indent="0" algn="ctr">
+              <a:buNone/>
+              <a:defRPr sz="1206"/>
             </a:lvl3pPr>
-            <a:lvl4pPr marL="1371600" indent="0" algn="ctr">
-              <a:buNone/>
-              <a:defRPr sz="1600"/>
+            <a:lvl4pPr marL="918972" indent="0" algn="ctr">
+              <a:buNone/>
+              <a:defRPr sz="1072"/>
             </a:lvl4pPr>
-            <a:lvl5pPr marL="1828800" indent="0" algn="ctr">
-              <a:buNone/>
-              <a:defRPr sz="1600"/>
+            <a:lvl5pPr marL="1225296" indent="0" algn="ctr">
+              <a:buNone/>
+              <a:defRPr sz="1072"/>
             </a:lvl5pPr>
-            <a:lvl6pPr marL="2286000" indent="0" algn="ctr">
-              <a:buNone/>
-              <a:defRPr sz="1600"/>
+            <a:lvl6pPr marL="1531620" indent="0" algn="ctr">
+              <a:buNone/>
+              <a:defRPr sz="1072"/>
             </a:lvl6pPr>
-            <a:lvl7pPr marL="2743200" indent="0" algn="ctr">
-              <a:buNone/>
-              <a:defRPr sz="1600"/>
+            <a:lvl7pPr marL="1837944" indent="0" algn="ctr">
+              <a:buNone/>
+              <a:defRPr sz="1072"/>
             </a:lvl7pPr>
-            <a:lvl8pPr marL="3200400" indent="0" algn="ctr">
-              <a:buNone/>
-              <a:defRPr sz="1600"/>
+            <a:lvl8pPr marL="2144268" indent="0" algn="ctr">
+              <a:buNone/>
+              <a:defRPr sz="1072"/>
             </a:lvl8pPr>
-            <a:lvl9pPr marL="3657600" indent="0" algn="ctr">
-              <a:buNone/>
-              <a:defRPr sz="1600"/>
+            <a:lvl9pPr marL="2450592" indent="0" algn="ctr">
+              <a:buNone/>
+              <a:defRPr sz="1072"/>
             </a:lvl9pPr>
           </a:lstStyle>
           <a:p>
@@ -239,19 +232,13 @@
               <a:rPr lang="en-US"/>
               <a:t>Click to edit Master subtitle style</a:t>
             </a:r>
-            <a:endParaRPr lang="en-DE"/>
-          </a:p>
-        </p:txBody>
-      </p:sp>
-      <p:sp>
-        <p:nvSpPr>
-          <p:cNvPr id="4" name="Date Placeholder 3">
-            <a:extLst>
-              <a:ext uri="{FF2B5EF4-FFF2-40B4-BE49-F238E27FC236}">
-                <a16:creationId xmlns:a16="http://schemas.microsoft.com/office/drawing/2014/main" id="{94E63F69-C711-0595-8D70-2D1B5A3211CB}"/>
-              </a:ext>
-            </a:extLst>
-          </p:cNvPr>
+            <a:endParaRPr lang="en-US" dirty="0"/>
+          </a:p>
+        </p:txBody>
+      </p:sp>
+      <p:sp>
+        <p:nvSpPr>
+          <p:cNvPr id="4" name="Date Placeholder 3"/>
           <p:cNvSpPr>
             <a:spLocks noGrp="1"/>
           </p:cNvSpPr>
@@ -266,7 +253,7 @@
           <a:p>
             <a:fld id="{31560ECC-EA69-4449-9ACE-963B3EEBCA8A}" type="datetimeFigureOut">
               <a:rPr lang="en-DE" smtClean="0"/>
-              <a:t>31/05/2026</a:t>
+              <a:t>05/31/2026</a:t>
             </a:fld>
             <a:endParaRPr lang="en-DE"/>
           </a:p>
@@ -274,13 +261,7 @@
       </p:sp>
       <p:sp>
         <p:nvSpPr>
-          <p:cNvPr id="5" name="Footer Placeholder 4">
-            <a:extLst>
-              <a:ext uri="{FF2B5EF4-FFF2-40B4-BE49-F238E27FC236}">
-                <a16:creationId xmlns:a16="http://schemas.microsoft.com/office/drawing/2014/main" id="{FAD312E1-4F84-21DB-C9B7-849D6CCBBEF6}"/>
-              </a:ext>
-            </a:extLst>
-          </p:cNvPr>
+          <p:cNvPr id="5" name="Footer Placeholder 4"/>
           <p:cNvSpPr>
             <a:spLocks noGrp="1"/>
           </p:cNvSpPr>
@@ -299,13 +280,7 @@
       </p:sp>
       <p:sp>
         <p:nvSpPr>
-          <p:cNvPr id="6" name="Slide Number Placeholder 5">
-            <a:extLst>
-              <a:ext uri="{FF2B5EF4-FFF2-40B4-BE49-F238E27FC236}">
-                <a16:creationId xmlns:a16="http://schemas.microsoft.com/office/drawing/2014/main" id="{40A9249E-F458-7E76-7F06-9E5A077CF06D}"/>
-              </a:ext>
-            </a:extLst>
-          </p:cNvPr>
+          <p:cNvPr id="6" name="Slide Number Placeholder 5"/>
           <p:cNvSpPr>
             <a:spLocks noGrp="1"/>
           </p:cNvSpPr>
@@ -329,7 +304,7 @@
     </p:spTree>
     <p:extLst>
       <p:ext uri="{BB962C8B-B14F-4D97-AF65-F5344CB8AC3E}">
-        <p14:creationId xmlns:p14="http://schemas.microsoft.com/office/powerpoint/2010/main" val="1371260988"/>
+        <p14:creationId xmlns:p14="http://schemas.microsoft.com/office/powerpoint/2010/main" val="2387442122"/>
       </p:ext>
     </p:extLst>
   </p:cSld>
@@ -358,13 +333,7 @@
       </p:grpSpPr>
       <p:sp>
         <p:nvSpPr>
-          <p:cNvPr id="2" name="Title 1">
-            <a:extLst>
-              <a:ext uri="{FF2B5EF4-FFF2-40B4-BE49-F238E27FC236}">
-                <a16:creationId xmlns:a16="http://schemas.microsoft.com/office/drawing/2014/main" id="{27062A69-BE54-7FA5-805F-1639EB4E151D}"/>
-              </a:ext>
-            </a:extLst>
-          </p:cNvPr>
+          <p:cNvPr id="2" name="Title 1"/>
           <p:cNvSpPr>
             <a:spLocks noGrp="1"/>
           </p:cNvSpPr>
@@ -381,19 +350,13 @@
               <a:rPr lang="en-US"/>
               <a:t>Click to edit Master title style</a:t>
             </a:r>
-            <a:endParaRPr lang="en-DE"/>
-          </a:p>
-        </p:txBody>
-      </p:sp>
-      <p:sp>
-        <p:nvSpPr>
-          <p:cNvPr id="3" name="Vertical Text Placeholder 2">
-            <a:extLst>
-              <a:ext uri="{FF2B5EF4-FFF2-40B4-BE49-F238E27FC236}">
-                <a16:creationId xmlns:a16="http://schemas.microsoft.com/office/drawing/2014/main" id="{9CBFF6EB-B530-2F25-8319-E3A08A7F7F3B}"/>
-              </a:ext>
-            </a:extLst>
-          </p:cNvPr>
+            <a:endParaRPr lang="en-US" dirty="0"/>
+          </a:p>
+        </p:txBody>
+      </p:sp>
+      <p:sp>
+        <p:nvSpPr>
+          <p:cNvPr id="3" name="Vertical Text Placeholder 2"/>
           <p:cNvSpPr>
             <a:spLocks noGrp="1"/>
           </p:cNvSpPr>
@@ -439,19 +402,13 @@
               <a:rPr lang="en-US"/>
               <a:t>Fifth level</a:t>
             </a:r>
-            <a:endParaRPr lang="en-DE"/>
-          </a:p>
-        </p:txBody>
-      </p:sp>
-      <p:sp>
-        <p:nvSpPr>
-          <p:cNvPr id="4" name="Date Placeholder 3">
-            <a:extLst>
-              <a:ext uri="{FF2B5EF4-FFF2-40B4-BE49-F238E27FC236}">
-                <a16:creationId xmlns:a16="http://schemas.microsoft.com/office/drawing/2014/main" id="{F75F7C0E-8681-0172-BE05-520CD5776350}"/>
-              </a:ext>
-            </a:extLst>
-          </p:cNvPr>
+            <a:endParaRPr lang="en-US" dirty="0"/>
+          </a:p>
+        </p:txBody>
+      </p:sp>
+      <p:sp>
+        <p:nvSpPr>
+          <p:cNvPr id="4" name="Date Placeholder 3"/>
           <p:cNvSpPr>
             <a:spLocks noGrp="1"/>
           </p:cNvSpPr>
@@ -466,7 +423,7 @@
           <a:p>
             <a:fld id="{31560ECC-EA69-4449-9ACE-963B3EEBCA8A}" type="datetimeFigureOut">
               <a:rPr lang="en-DE" smtClean="0"/>
-              <a:t>31/05/2026</a:t>
+              <a:t>05/31/2026</a:t>
             </a:fld>
             <a:endParaRPr lang="en-DE"/>
           </a:p>
@@ -474,13 +431,7 @@
       </p:sp>
       <p:sp>
         <p:nvSpPr>
-          <p:cNvPr id="5" name="Footer Placeholder 4">
-            <a:extLst>
-              <a:ext uri="{FF2B5EF4-FFF2-40B4-BE49-F238E27FC236}">
-                <a16:creationId xmlns:a16="http://schemas.microsoft.com/office/drawing/2014/main" id="{D9343189-9754-5CB3-92A1-B545DE48DD53}"/>
-              </a:ext>
-            </a:extLst>
-          </p:cNvPr>
+          <p:cNvPr id="5" name="Footer Placeholder 4"/>
           <p:cNvSpPr>
             <a:spLocks noGrp="1"/>
           </p:cNvSpPr>
@@ -499,13 +450,7 @@
       </p:sp>
       <p:sp>
         <p:nvSpPr>
-          <p:cNvPr id="6" name="Slide Number Placeholder 5">
-            <a:extLst>
-              <a:ext uri="{FF2B5EF4-FFF2-40B4-BE49-F238E27FC236}">
-                <a16:creationId xmlns:a16="http://schemas.microsoft.com/office/drawing/2014/main" id="{12570DF6-FE31-F848-A2FB-EC372460761B}"/>
-              </a:ext>
-            </a:extLst>
-          </p:cNvPr>
+          <p:cNvPr id="6" name="Slide Number Placeholder 5"/>
           <p:cNvSpPr>
             <a:spLocks noGrp="1"/>
           </p:cNvSpPr>
@@ -529,7 +474,7 @@
     </p:spTree>
     <p:extLst>
       <p:ext uri="{BB962C8B-B14F-4D97-AF65-F5344CB8AC3E}">
-        <p14:creationId xmlns:p14="http://schemas.microsoft.com/office/powerpoint/2010/main" val="3897493832"/>
+        <p14:creationId xmlns:p14="http://schemas.microsoft.com/office/powerpoint/2010/main" val="3128665733"/>
       </p:ext>
     </p:extLst>
   </p:cSld>
@@ -558,13 +503,7 @@
       </p:grpSpPr>
       <p:sp>
         <p:nvSpPr>
-          <p:cNvPr id="2" name="Vertical Title 1">
-            <a:extLst>
-              <a:ext uri="{FF2B5EF4-FFF2-40B4-BE49-F238E27FC236}">
-                <a16:creationId xmlns:a16="http://schemas.microsoft.com/office/drawing/2014/main" id="{8B0E904F-0BC5-9162-2D54-EB4680F87A9F}"/>
-              </a:ext>
-            </a:extLst>
-          </p:cNvPr>
+          <p:cNvPr id="2" name="Vertical Title 1"/>
           <p:cNvSpPr>
             <a:spLocks noGrp="1"/>
           </p:cNvSpPr>
@@ -574,8 +513,8 @@
         </p:nvSpPr>
         <p:spPr>
           <a:xfrm>
-            <a:off x="8724900" y="365125"/>
-            <a:ext cx="2628900" cy="5811838"/>
+            <a:off x="4384036" y="262856"/>
+            <a:ext cx="1320954" cy="4183985"/>
           </a:xfrm>
         </p:spPr>
         <p:txBody>
@@ -586,19 +525,13 @@
               <a:rPr lang="en-US"/>
               <a:t>Click to edit Master title style</a:t>
             </a:r>
-            <a:endParaRPr lang="en-DE"/>
-          </a:p>
-        </p:txBody>
-      </p:sp>
-      <p:sp>
-        <p:nvSpPr>
-          <p:cNvPr id="3" name="Vertical Text Placeholder 2">
-            <a:extLst>
-              <a:ext uri="{FF2B5EF4-FFF2-40B4-BE49-F238E27FC236}">
-                <a16:creationId xmlns:a16="http://schemas.microsoft.com/office/drawing/2014/main" id="{DC051C11-7ECB-DDE0-5613-F73BBA63EB9A}"/>
-              </a:ext>
-            </a:extLst>
-          </p:cNvPr>
+            <a:endParaRPr lang="en-US" dirty="0"/>
+          </a:p>
+        </p:txBody>
+      </p:sp>
+      <p:sp>
+        <p:nvSpPr>
+          <p:cNvPr id="3" name="Vertical Text Placeholder 2"/>
           <p:cNvSpPr>
             <a:spLocks noGrp="1"/>
           </p:cNvSpPr>
@@ -608,8 +541,8 @@
         </p:nvSpPr>
         <p:spPr>
           <a:xfrm>
-            <a:off x="838200" y="365125"/>
-            <a:ext cx="7734300" cy="5811838"/>
+            <a:off x="421174" y="262856"/>
+            <a:ext cx="3886285" cy="4183985"/>
           </a:xfrm>
         </p:spPr>
         <p:txBody>
@@ -649,19 +582,13 @@
               <a:rPr lang="en-US"/>
               <a:t>Fifth level</a:t>
             </a:r>
-            <a:endParaRPr lang="en-DE"/>
-          </a:p>
-        </p:txBody>
-      </p:sp>
-      <p:sp>
-        <p:nvSpPr>
-          <p:cNvPr id="4" name="Date Placeholder 3">
-            <a:extLst>
-              <a:ext uri="{FF2B5EF4-FFF2-40B4-BE49-F238E27FC236}">
-                <a16:creationId xmlns:a16="http://schemas.microsoft.com/office/drawing/2014/main" id="{031DDE45-49FA-8334-95E0-BF70FB7D9E46}"/>
-              </a:ext>
-            </a:extLst>
-          </p:cNvPr>
+            <a:endParaRPr lang="en-US" dirty="0"/>
+          </a:p>
+        </p:txBody>
+      </p:sp>
+      <p:sp>
+        <p:nvSpPr>
+          <p:cNvPr id="4" name="Date Placeholder 3"/>
           <p:cNvSpPr>
             <a:spLocks noGrp="1"/>
           </p:cNvSpPr>
@@ -676,7 +603,7 @@
           <a:p>
             <a:fld id="{31560ECC-EA69-4449-9ACE-963B3EEBCA8A}" type="datetimeFigureOut">
               <a:rPr lang="en-DE" smtClean="0"/>
-              <a:t>31/05/2026</a:t>
+              <a:t>05/31/2026</a:t>
             </a:fld>
             <a:endParaRPr lang="en-DE"/>
           </a:p>
@@ -684,13 +611,7 @@
       </p:sp>
       <p:sp>
         <p:nvSpPr>
-          <p:cNvPr id="5" name="Footer Placeholder 4">
-            <a:extLst>
-              <a:ext uri="{FF2B5EF4-FFF2-40B4-BE49-F238E27FC236}">
-                <a16:creationId xmlns:a16="http://schemas.microsoft.com/office/drawing/2014/main" id="{B98EBE21-4600-78ED-EA6C-E0601676677B}"/>
-              </a:ext>
-            </a:extLst>
-          </p:cNvPr>
+          <p:cNvPr id="5" name="Footer Placeholder 4"/>
           <p:cNvSpPr>
             <a:spLocks noGrp="1"/>
           </p:cNvSpPr>
@@ -709,13 +630,7 @@
       </p:sp>
       <p:sp>
         <p:nvSpPr>
-          <p:cNvPr id="6" name="Slide Number Placeholder 5">
-            <a:extLst>
-              <a:ext uri="{FF2B5EF4-FFF2-40B4-BE49-F238E27FC236}">
-                <a16:creationId xmlns:a16="http://schemas.microsoft.com/office/drawing/2014/main" id="{AF06A6CB-06BE-C411-7D5F-D60411201B7A}"/>
-              </a:ext>
-            </a:extLst>
-          </p:cNvPr>
+          <p:cNvPr id="6" name="Slide Number Placeholder 5"/>
           <p:cNvSpPr>
             <a:spLocks noGrp="1"/>
           </p:cNvSpPr>
@@ -739,7 +654,7 @@
     </p:spTree>
     <p:extLst>
       <p:ext uri="{BB962C8B-B14F-4D97-AF65-F5344CB8AC3E}">
-        <p14:creationId xmlns:p14="http://schemas.microsoft.com/office/powerpoint/2010/main" val="2254388908"/>
+        <p14:creationId xmlns:p14="http://schemas.microsoft.com/office/powerpoint/2010/main" val="2094147084"/>
       </p:ext>
     </p:extLst>
   </p:cSld>
@@ -768,13 +683,7 @@
       </p:grpSpPr>
       <p:sp>
         <p:nvSpPr>
-          <p:cNvPr id="2" name="Title 1">
-            <a:extLst>
-              <a:ext uri="{FF2B5EF4-FFF2-40B4-BE49-F238E27FC236}">
-                <a16:creationId xmlns:a16="http://schemas.microsoft.com/office/drawing/2014/main" id="{4EEF0B92-6425-3CFE-7F2E-B91067E1A13C}"/>
-              </a:ext>
-            </a:extLst>
-          </p:cNvPr>
+          <p:cNvPr id="2" name="Title 1"/>
           <p:cNvSpPr>
             <a:spLocks noGrp="1"/>
           </p:cNvSpPr>
@@ -791,19 +700,13 @@
               <a:rPr lang="en-US"/>
               <a:t>Click to edit Master title style</a:t>
             </a:r>
-            <a:endParaRPr lang="en-DE"/>
-          </a:p>
-        </p:txBody>
-      </p:sp>
-      <p:sp>
-        <p:nvSpPr>
-          <p:cNvPr id="3" name="Content Placeholder 2">
-            <a:extLst>
-              <a:ext uri="{FF2B5EF4-FFF2-40B4-BE49-F238E27FC236}">
-                <a16:creationId xmlns:a16="http://schemas.microsoft.com/office/drawing/2014/main" id="{8873BEF1-D15D-4599-4F86-C99B7630481F}"/>
-              </a:ext>
-            </a:extLst>
-          </p:cNvPr>
+            <a:endParaRPr lang="en-US" dirty="0"/>
+          </a:p>
+        </p:txBody>
+      </p:sp>
+      <p:sp>
+        <p:nvSpPr>
+          <p:cNvPr id="3" name="Content Placeholder 2"/>
           <p:cNvSpPr>
             <a:spLocks noGrp="1"/>
           </p:cNvSpPr>
@@ -849,19 +752,13 @@
               <a:rPr lang="en-US"/>
               <a:t>Fifth level</a:t>
             </a:r>
-            <a:endParaRPr lang="en-DE"/>
-          </a:p>
-        </p:txBody>
-      </p:sp>
-      <p:sp>
-        <p:nvSpPr>
-          <p:cNvPr id="4" name="Date Placeholder 3">
-            <a:extLst>
-              <a:ext uri="{FF2B5EF4-FFF2-40B4-BE49-F238E27FC236}">
-                <a16:creationId xmlns:a16="http://schemas.microsoft.com/office/drawing/2014/main" id="{6DFB462F-81E6-287B-9D73-1F92319489FC}"/>
-              </a:ext>
-            </a:extLst>
-          </p:cNvPr>
+            <a:endParaRPr lang="en-US" dirty="0"/>
+          </a:p>
+        </p:txBody>
+      </p:sp>
+      <p:sp>
+        <p:nvSpPr>
+          <p:cNvPr id="4" name="Date Placeholder 3"/>
           <p:cNvSpPr>
             <a:spLocks noGrp="1"/>
           </p:cNvSpPr>
@@ -876,7 +773,7 @@
           <a:p>
             <a:fld id="{31560ECC-EA69-4449-9ACE-963B3EEBCA8A}" type="datetimeFigureOut">
               <a:rPr lang="en-DE" smtClean="0"/>
-              <a:t>31/05/2026</a:t>
+              <a:t>05/31/2026</a:t>
             </a:fld>
             <a:endParaRPr lang="en-DE"/>
           </a:p>
@@ -884,13 +781,7 @@
       </p:sp>
       <p:sp>
         <p:nvSpPr>
-          <p:cNvPr id="5" name="Footer Placeholder 4">
-            <a:extLst>
-              <a:ext uri="{FF2B5EF4-FFF2-40B4-BE49-F238E27FC236}">
-                <a16:creationId xmlns:a16="http://schemas.microsoft.com/office/drawing/2014/main" id="{6C970BEF-F209-7FA6-35D9-0DC185CEF13F}"/>
-              </a:ext>
-            </a:extLst>
-          </p:cNvPr>
+          <p:cNvPr id="5" name="Footer Placeholder 4"/>
           <p:cNvSpPr>
             <a:spLocks noGrp="1"/>
           </p:cNvSpPr>
@@ -909,13 +800,7 @@
       </p:sp>
       <p:sp>
         <p:nvSpPr>
-          <p:cNvPr id="6" name="Slide Number Placeholder 5">
-            <a:extLst>
-              <a:ext uri="{FF2B5EF4-FFF2-40B4-BE49-F238E27FC236}">
-                <a16:creationId xmlns:a16="http://schemas.microsoft.com/office/drawing/2014/main" id="{EFA03B56-EE13-DC13-7502-97FE44410653}"/>
-              </a:ext>
-            </a:extLst>
-          </p:cNvPr>
+          <p:cNvPr id="6" name="Slide Number Placeholder 5"/>
           <p:cNvSpPr>
             <a:spLocks noGrp="1"/>
           </p:cNvSpPr>
@@ -939,7 +824,7 @@
     </p:spTree>
     <p:extLst>
       <p:ext uri="{BB962C8B-B14F-4D97-AF65-F5344CB8AC3E}">
-        <p14:creationId xmlns:p14="http://schemas.microsoft.com/office/powerpoint/2010/main" val="3470045079"/>
+        <p14:creationId xmlns:p14="http://schemas.microsoft.com/office/powerpoint/2010/main" val="1697307093"/>
       </p:ext>
     </p:extLst>
   </p:cSld>
@@ -968,13 +853,7 @@
       </p:grpSpPr>
       <p:sp>
         <p:nvSpPr>
-          <p:cNvPr id="2" name="Title 1">
-            <a:extLst>
-              <a:ext uri="{FF2B5EF4-FFF2-40B4-BE49-F238E27FC236}">
-                <a16:creationId xmlns:a16="http://schemas.microsoft.com/office/drawing/2014/main" id="{F68E336B-B37F-7834-7F38-14A15E4EC043}"/>
-              </a:ext>
-            </a:extLst>
-          </p:cNvPr>
+          <p:cNvPr id="2" name="Title 1"/>
           <p:cNvSpPr>
             <a:spLocks noGrp="1"/>
           </p:cNvSpPr>
@@ -984,15 +863,15 @@
         </p:nvSpPr>
         <p:spPr>
           <a:xfrm>
-            <a:off x="831850" y="1709738"/>
-            <a:ext cx="10515600" cy="2852737"/>
+            <a:off x="417983" y="1230854"/>
+            <a:ext cx="5283816" cy="2053706"/>
           </a:xfrm>
         </p:spPr>
         <p:txBody>
           <a:bodyPr anchor="b"/>
           <a:lstStyle>
             <a:lvl1pPr>
-              <a:defRPr sz="6000"/>
+              <a:defRPr sz="4020"/>
             </a:lvl1pPr>
           </a:lstStyle>
           <a:p>
@@ -1000,19 +879,13 @@
               <a:rPr lang="en-US"/>
               <a:t>Click to edit Master title style</a:t>
             </a:r>
-            <a:endParaRPr lang="en-DE"/>
-          </a:p>
-        </p:txBody>
-      </p:sp>
-      <p:sp>
-        <p:nvSpPr>
-          <p:cNvPr id="3" name="Text Placeholder 2">
-            <a:extLst>
-              <a:ext uri="{FF2B5EF4-FFF2-40B4-BE49-F238E27FC236}">
-                <a16:creationId xmlns:a16="http://schemas.microsoft.com/office/drawing/2014/main" id="{991389A7-B004-EAFC-3B39-292815664904}"/>
-              </a:ext>
-            </a:extLst>
-          </p:cNvPr>
+            <a:endParaRPr lang="en-US" dirty="0"/>
+          </a:p>
+        </p:txBody>
+      </p:sp>
+      <p:sp>
+        <p:nvSpPr>
+          <p:cNvPr id="3" name="Text Placeholder 2"/>
           <p:cNvSpPr>
             <a:spLocks noGrp="1"/>
           </p:cNvSpPr>
@@ -1022,8 +895,8 @@
         </p:nvSpPr>
         <p:spPr>
           <a:xfrm>
-            <a:off x="831850" y="4589463"/>
-            <a:ext cx="10515600" cy="1500187"/>
+            <a:off x="417983" y="3303989"/>
+            <a:ext cx="5283816" cy="1079996"/>
           </a:xfrm>
         </p:spPr>
         <p:txBody>
@@ -1031,7 +904,7 @@
           <a:lstStyle>
             <a:lvl1pPr marL="0" indent="0">
               <a:buNone/>
-              <a:defRPr sz="2400">
+              <a:defRPr sz="1608">
                 <a:solidFill>
                   <a:schemeClr val="tx1">
                     <a:tint val="82000"/>
@@ -1039,9 +912,9 @@
                 </a:solidFill>
               </a:defRPr>
             </a:lvl1pPr>
-            <a:lvl2pPr marL="457200" indent="0">
-              <a:buNone/>
-              <a:defRPr sz="2000">
+            <a:lvl2pPr marL="306324" indent="0">
+              <a:buNone/>
+              <a:defRPr sz="1340">
                 <a:solidFill>
                   <a:schemeClr val="tx1">
                     <a:tint val="82000"/>
@@ -1049,9 +922,9 @@
                 </a:solidFill>
               </a:defRPr>
             </a:lvl2pPr>
-            <a:lvl3pPr marL="914400" indent="0">
-              <a:buNone/>
-              <a:defRPr sz="1800">
+            <a:lvl3pPr marL="612648" indent="0">
+              <a:buNone/>
+              <a:defRPr sz="1206">
                 <a:solidFill>
                   <a:schemeClr val="tx1">
                     <a:tint val="82000"/>
@@ -1059,9 +932,9 @@
                 </a:solidFill>
               </a:defRPr>
             </a:lvl3pPr>
-            <a:lvl4pPr marL="1371600" indent="0">
-              <a:buNone/>
-              <a:defRPr sz="1600">
+            <a:lvl4pPr marL="918972" indent="0">
+              <a:buNone/>
+              <a:defRPr sz="1072">
                 <a:solidFill>
                   <a:schemeClr val="tx1">
                     <a:tint val="82000"/>
@@ -1069,9 +942,9 @@
                 </a:solidFill>
               </a:defRPr>
             </a:lvl4pPr>
-            <a:lvl5pPr marL="1828800" indent="0">
-              <a:buNone/>
-              <a:defRPr sz="1600">
+            <a:lvl5pPr marL="1225296" indent="0">
+              <a:buNone/>
+              <a:defRPr sz="1072">
                 <a:solidFill>
                   <a:schemeClr val="tx1">
                     <a:tint val="82000"/>
@@ -1079,9 +952,9 @@
                 </a:solidFill>
               </a:defRPr>
             </a:lvl5pPr>
-            <a:lvl6pPr marL="2286000" indent="0">
-              <a:buNone/>
-              <a:defRPr sz="1600">
+            <a:lvl6pPr marL="1531620" indent="0">
+              <a:buNone/>
+              <a:defRPr sz="1072">
                 <a:solidFill>
                   <a:schemeClr val="tx1">
                     <a:tint val="82000"/>
@@ -1089,9 +962,9 @@
                 </a:solidFill>
               </a:defRPr>
             </a:lvl6pPr>
-            <a:lvl7pPr marL="2743200" indent="0">
-              <a:buNone/>
-              <a:defRPr sz="1600">
+            <a:lvl7pPr marL="1837944" indent="0">
+              <a:buNone/>
+              <a:defRPr sz="1072">
                 <a:solidFill>
                   <a:schemeClr val="tx1">
                     <a:tint val="82000"/>
@@ -1099,9 +972,9 @@
                 </a:solidFill>
               </a:defRPr>
             </a:lvl7pPr>
-            <a:lvl8pPr marL="3200400" indent="0">
-              <a:buNone/>
-              <a:defRPr sz="1600">
+            <a:lvl8pPr marL="2144268" indent="0">
+              <a:buNone/>
+              <a:defRPr sz="1072">
                 <a:solidFill>
                   <a:schemeClr val="tx1">
                     <a:tint val="82000"/>
@@ -1109,9 +982,9 @@
                 </a:solidFill>
               </a:defRPr>
             </a:lvl8pPr>
-            <a:lvl9pPr marL="3657600" indent="0">
-              <a:buNone/>
-              <a:defRPr sz="1600">
+            <a:lvl9pPr marL="2450592" indent="0">
+              <a:buNone/>
+              <a:defRPr sz="1072">
                 <a:solidFill>
                   <a:schemeClr val="tx1">
                     <a:tint val="82000"/>
@@ -1131,13 +1004,7 @@
       </p:sp>
       <p:sp>
         <p:nvSpPr>
-          <p:cNvPr id="4" name="Date Placeholder 3">
-            <a:extLst>
-              <a:ext uri="{FF2B5EF4-FFF2-40B4-BE49-F238E27FC236}">
-                <a16:creationId xmlns:a16="http://schemas.microsoft.com/office/drawing/2014/main" id="{285E5B1E-2D22-4B98-42F0-D86A23E93A64}"/>
-              </a:ext>
-            </a:extLst>
-          </p:cNvPr>
+          <p:cNvPr id="4" name="Date Placeholder 3"/>
           <p:cNvSpPr>
             <a:spLocks noGrp="1"/>
           </p:cNvSpPr>
@@ -1152,7 +1019,7 @@
           <a:p>
             <a:fld id="{31560ECC-EA69-4449-9ACE-963B3EEBCA8A}" type="datetimeFigureOut">
               <a:rPr lang="en-DE" smtClean="0"/>
-              <a:t>31/05/2026</a:t>
+              <a:t>05/31/2026</a:t>
             </a:fld>
             <a:endParaRPr lang="en-DE"/>
           </a:p>
@@ -1160,13 +1027,7 @@
       </p:sp>
       <p:sp>
         <p:nvSpPr>
-          <p:cNvPr id="5" name="Footer Placeholder 4">
-            <a:extLst>
-              <a:ext uri="{FF2B5EF4-FFF2-40B4-BE49-F238E27FC236}">
-                <a16:creationId xmlns:a16="http://schemas.microsoft.com/office/drawing/2014/main" id="{BBF68F06-376D-D1A7-24F1-3551F58CAAD1}"/>
-              </a:ext>
-            </a:extLst>
-          </p:cNvPr>
+          <p:cNvPr id="5" name="Footer Placeholder 4"/>
           <p:cNvSpPr>
             <a:spLocks noGrp="1"/>
           </p:cNvSpPr>
@@ -1185,13 +1046,7 @@
       </p:sp>
       <p:sp>
         <p:nvSpPr>
-          <p:cNvPr id="6" name="Slide Number Placeholder 5">
-            <a:extLst>
-              <a:ext uri="{FF2B5EF4-FFF2-40B4-BE49-F238E27FC236}">
-                <a16:creationId xmlns:a16="http://schemas.microsoft.com/office/drawing/2014/main" id="{577C4C4E-0FB7-01A2-6930-ED524DE538D6}"/>
-              </a:ext>
-            </a:extLst>
-          </p:cNvPr>
+          <p:cNvPr id="6" name="Slide Number Placeholder 5"/>
           <p:cNvSpPr>
             <a:spLocks noGrp="1"/>
           </p:cNvSpPr>
@@ -1215,7 +1070,7 @@
     </p:spTree>
     <p:extLst>
       <p:ext uri="{BB962C8B-B14F-4D97-AF65-F5344CB8AC3E}">
-        <p14:creationId xmlns:p14="http://schemas.microsoft.com/office/powerpoint/2010/main" val="1760559749"/>
+        <p14:creationId xmlns:p14="http://schemas.microsoft.com/office/powerpoint/2010/main" val="399438987"/>
       </p:ext>
     </p:extLst>
   </p:cSld>
@@ -1244,13 +1099,7 @@
       </p:grpSpPr>
       <p:sp>
         <p:nvSpPr>
-          <p:cNvPr id="2" name="Title 1">
-            <a:extLst>
-              <a:ext uri="{FF2B5EF4-FFF2-40B4-BE49-F238E27FC236}">
-                <a16:creationId xmlns:a16="http://schemas.microsoft.com/office/drawing/2014/main" id="{1E1B3B11-7A9A-BCAA-8715-8E18E6226400}"/>
-              </a:ext>
-            </a:extLst>
-          </p:cNvPr>
+          <p:cNvPr id="2" name="Title 1"/>
           <p:cNvSpPr>
             <a:spLocks noGrp="1"/>
           </p:cNvSpPr>
@@ -1267,19 +1116,13 @@
               <a:rPr lang="en-US"/>
               <a:t>Click to edit Master title style</a:t>
             </a:r>
-            <a:endParaRPr lang="en-DE"/>
-          </a:p>
-        </p:txBody>
-      </p:sp>
-      <p:sp>
-        <p:nvSpPr>
-          <p:cNvPr id="3" name="Content Placeholder 2">
-            <a:extLst>
-              <a:ext uri="{FF2B5EF4-FFF2-40B4-BE49-F238E27FC236}">
-                <a16:creationId xmlns:a16="http://schemas.microsoft.com/office/drawing/2014/main" id="{9E72985E-96A4-855F-8035-5B23F5EA24F6}"/>
-              </a:ext>
-            </a:extLst>
-          </p:cNvPr>
+            <a:endParaRPr lang="en-US" dirty="0"/>
+          </a:p>
+        </p:txBody>
+      </p:sp>
+      <p:sp>
+        <p:nvSpPr>
+          <p:cNvPr id="3" name="Content Placeholder 2"/>
           <p:cNvSpPr>
             <a:spLocks noGrp="1"/>
           </p:cNvSpPr>
@@ -1289,8 +1132,8 @@
         </p:nvSpPr>
         <p:spPr>
           <a:xfrm>
-            <a:off x="838200" y="1825625"/>
-            <a:ext cx="5181600" cy="4351338"/>
+            <a:off x="421174" y="1314281"/>
+            <a:ext cx="2603619" cy="3132560"/>
           </a:xfrm>
         </p:spPr>
         <p:txBody>
@@ -1330,19 +1173,13 @@
               <a:rPr lang="en-US"/>
               <a:t>Fifth level</a:t>
             </a:r>
-            <a:endParaRPr lang="en-DE"/>
-          </a:p>
-        </p:txBody>
-      </p:sp>
-      <p:sp>
-        <p:nvSpPr>
-          <p:cNvPr id="4" name="Content Placeholder 3">
-            <a:extLst>
-              <a:ext uri="{FF2B5EF4-FFF2-40B4-BE49-F238E27FC236}">
-                <a16:creationId xmlns:a16="http://schemas.microsoft.com/office/drawing/2014/main" id="{50FD9948-3394-D682-EA9C-63FF3C042ECD}"/>
-              </a:ext>
-            </a:extLst>
-          </p:cNvPr>
+            <a:endParaRPr lang="en-US" dirty="0"/>
+          </a:p>
+        </p:txBody>
+      </p:sp>
+      <p:sp>
+        <p:nvSpPr>
+          <p:cNvPr id="4" name="Content Placeholder 3"/>
           <p:cNvSpPr>
             <a:spLocks noGrp="1"/>
           </p:cNvSpPr>
@@ -1352,8 +1189,8 @@
         </p:nvSpPr>
         <p:spPr>
           <a:xfrm>
-            <a:off x="6172200" y="1825625"/>
-            <a:ext cx="5181600" cy="4351338"/>
+            <a:off x="3101370" y="1314281"/>
+            <a:ext cx="2603619" cy="3132560"/>
           </a:xfrm>
         </p:spPr>
         <p:txBody>
@@ -1393,19 +1230,13 @@
               <a:rPr lang="en-US"/>
               <a:t>Fifth level</a:t>
             </a:r>
-            <a:endParaRPr lang="en-DE"/>
-          </a:p>
-        </p:txBody>
-      </p:sp>
-      <p:sp>
-        <p:nvSpPr>
-          <p:cNvPr id="5" name="Date Placeholder 4">
-            <a:extLst>
-              <a:ext uri="{FF2B5EF4-FFF2-40B4-BE49-F238E27FC236}">
-                <a16:creationId xmlns:a16="http://schemas.microsoft.com/office/drawing/2014/main" id="{C20DC291-9BFF-D1B1-2633-F2C42A4E77B3}"/>
-              </a:ext>
-            </a:extLst>
-          </p:cNvPr>
+            <a:endParaRPr lang="en-US" dirty="0"/>
+          </a:p>
+        </p:txBody>
+      </p:sp>
+      <p:sp>
+        <p:nvSpPr>
+          <p:cNvPr id="5" name="Date Placeholder 4"/>
           <p:cNvSpPr>
             <a:spLocks noGrp="1"/>
           </p:cNvSpPr>
@@ -1420,7 +1251,7 @@
           <a:p>
             <a:fld id="{31560ECC-EA69-4449-9ACE-963B3EEBCA8A}" type="datetimeFigureOut">
               <a:rPr lang="en-DE" smtClean="0"/>
-              <a:t>31/05/2026</a:t>
+              <a:t>05/31/2026</a:t>
             </a:fld>
             <a:endParaRPr lang="en-DE"/>
           </a:p>
@@ -1428,13 +1259,7 @@
       </p:sp>
       <p:sp>
         <p:nvSpPr>
-          <p:cNvPr id="6" name="Footer Placeholder 5">
-            <a:extLst>
-              <a:ext uri="{FF2B5EF4-FFF2-40B4-BE49-F238E27FC236}">
-                <a16:creationId xmlns:a16="http://schemas.microsoft.com/office/drawing/2014/main" id="{EBC1A15C-C2C1-2D28-060D-BB6524B2C0DA}"/>
-              </a:ext>
-            </a:extLst>
-          </p:cNvPr>
+          <p:cNvPr id="6" name="Footer Placeholder 5"/>
           <p:cNvSpPr>
             <a:spLocks noGrp="1"/>
           </p:cNvSpPr>
@@ -1453,13 +1278,7 @@
       </p:sp>
       <p:sp>
         <p:nvSpPr>
-          <p:cNvPr id="7" name="Slide Number Placeholder 6">
-            <a:extLst>
-              <a:ext uri="{FF2B5EF4-FFF2-40B4-BE49-F238E27FC236}">
-                <a16:creationId xmlns:a16="http://schemas.microsoft.com/office/drawing/2014/main" id="{21D9E9C5-9D24-58C7-3C4B-2DF5D8FC30C2}"/>
-              </a:ext>
-            </a:extLst>
-          </p:cNvPr>
+          <p:cNvPr id="7" name="Slide Number Placeholder 6"/>
           <p:cNvSpPr>
             <a:spLocks noGrp="1"/>
           </p:cNvSpPr>
@@ -1483,7 +1302,7 @@
     </p:spTree>
     <p:extLst>
       <p:ext uri="{BB962C8B-B14F-4D97-AF65-F5344CB8AC3E}">
-        <p14:creationId xmlns:p14="http://schemas.microsoft.com/office/powerpoint/2010/main" val="3127494161"/>
+        <p14:creationId xmlns:p14="http://schemas.microsoft.com/office/powerpoint/2010/main" val="3629252731"/>
       </p:ext>
     </p:extLst>
   </p:cSld>
@@ -1512,13 +1331,7 @@
       </p:grpSpPr>
       <p:sp>
         <p:nvSpPr>
-          <p:cNvPr id="2" name="Title 1">
-            <a:extLst>
-              <a:ext uri="{FF2B5EF4-FFF2-40B4-BE49-F238E27FC236}">
-                <a16:creationId xmlns:a16="http://schemas.microsoft.com/office/drawing/2014/main" id="{29843EC6-C643-C16B-B073-7B6EB8454700}"/>
-              </a:ext>
-            </a:extLst>
-          </p:cNvPr>
+          <p:cNvPr id="2" name="Title 1"/>
           <p:cNvSpPr>
             <a:spLocks noGrp="1"/>
           </p:cNvSpPr>
@@ -1528,8 +1341,8 @@
         </p:nvSpPr>
         <p:spPr>
           <a:xfrm>
-            <a:off x="839788" y="365125"/>
-            <a:ext cx="10515600" cy="1325563"/>
+            <a:off x="421971" y="262857"/>
+            <a:ext cx="5283816" cy="954283"/>
           </a:xfrm>
         </p:spPr>
         <p:txBody>
@@ -1540,19 +1353,13 @@
               <a:rPr lang="en-US"/>
               <a:t>Click to edit Master title style</a:t>
             </a:r>
-            <a:endParaRPr lang="en-DE"/>
-          </a:p>
-        </p:txBody>
-      </p:sp>
-      <p:sp>
-        <p:nvSpPr>
-          <p:cNvPr id="3" name="Text Placeholder 2">
-            <a:extLst>
-              <a:ext uri="{FF2B5EF4-FFF2-40B4-BE49-F238E27FC236}">
-                <a16:creationId xmlns:a16="http://schemas.microsoft.com/office/drawing/2014/main" id="{3EE1F50D-4CF7-2110-88EB-DAC881D13191}"/>
-              </a:ext>
-            </a:extLst>
-          </p:cNvPr>
+            <a:endParaRPr lang="en-US" dirty="0"/>
+          </a:p>
+        </p:txBody>
+      </p:sp>
+      <p:sp>
+        <p:nvSpPr>
+          <p:cNvPr id="3" name="Text Placeholder 2"/>
           <p:cNvSpPr>
             <a:spLocks noGrp="1"/>
           </p:cNvSpPr>
@@ -1562,8 +1369,8 @@
         </p:nvSpPr>
         <p:spPr>
           <a:xfrm>
-            <a:off x="839788" y="1681163"/>
-            <a:ext cx="5157787" cy="823912"/>
+            <a:off x="421972" y="1210282"/>
+            <a:ext cx="2591654" cy="593140"/>
           </a:xfrm>
         </p:spPr>
         <p:txBody>
@@ -1571,39 +1378,39 @@
           <a:lstStyle>
             <a:lvl1pPr marL="0" indent="0">
               <a:buNone/>
-              <a:defRPr sz="2400" b="1"/>
+              <a:defRPr sz="1608" b="1"/>
             </a:lvl1pPr>
-            <a:lvl2pPr marL="457200" indent="0">
-              <a:buNone/>
-              <a:defRPr sz="2000" b="1"/>
+            <a:lvl2pPr marL="306324" indent="0">
+              <a:buNone/>
+              <a:defRPr sz="1340" b="1"/>
             </a:lvl2pPr>
-            <a:lvl3pPr marL="914400" indent="0">
-              <a:buNone/>
-              <a:defRPr sz="1800" b="1"/>
+            <a:lvl3pPr marL="612648" indent="0">
+              <a:buNone/>
+              <a:defRPr sz="1206" b="1"/>
             </a:lvl3pPr>
-            <a:lvl4pPr marL="1371600" indent="0">
-              <a:buNone/>
-              <a:defRPr sz="1600" b="1"/>
+            <a:lvl4pPr marL="918972" indent="0">
+              <a:buNone/>
+              <a:defRPr sz="1072" b="1"/>
             </a:lvl4pPr>
-            <a:lvl5pPr marL="1828800" indent="0">
-              <a:buNone/>
-              <a:defRPr sz="1600" b="1"/>
+            <a:lvl5pPr marL="1225296" indent="0">
+              <a:buNone/>
+              <a:defRPr sz="1072" b="1"/>
             </a:lvl5pPr>
-            <a:lvl6pPr marL="2286000" indent="0">
-              <a:buNone/>
-              <a:defRPr sz="1600" b="1"/>
+            <a:lvl6pPr marL="1531620" indent="0">
+              <a:buNone/>
+              <a:defRPr sz="1072" b="1"/>
             </a:lvl6pPr>
-            <a:lvl7pPr marL="2743200" indent="0">
-              <a:buNone/>
-              <a:defRPr sz="1600" b="1"/>
+            <a:lvl7pPr marL="1837944" indent="0">
+              <a:buNone/>
+              <a:defRPr sz="1072" b="1"/>
             </a:lvl7pPr>
-            <a:lvl8pPr marL="3200400" indent="0">
-              <a:buNone/>
-              <a:defRPr sz="1600" b="1"/>
+            <a:lvl8pPr marL="2144268" indent="0">
+              <a:buNone/>
+              <a:defRPr sz="1072" b="1"/>
             </a:lvl8pPr>
-            <a:lvl9pPr marL="3657600" indent="0">
-              <a:buNone/>
-              <a:defRPr sz="1600" b="1"/>
+            <a:lvl9pPr marL="2450592" indent="0">
+              <a:buNone/>
+              <a:defRPr sz="1072" b="1"/>
             </a:lvl9pPr>
           </a:lstStyle>
           <a:p>
@@ -1617,13 +1424,7 @@
       </p:sp>
       <p:sp>
         <p:nvSpPr>
-          <p:cNvPr id="4" name="Content Placeholder 3">
-            <a:extLst>
-              <a:ext uri="{FF2B5EF4-FFF2-40B4-BE49-F238E27FC236}">
-                <a16:creationId xmlns:a16="http://schemas.microsoft.com/office/drawing/2014/main" id="{3FD36ED6-C7D7-48A5-7ED4-96556BB9D176}"/>
-              </a:ext>
-            </a:extLst>
-          </p:cNvPr>
+          <p:cNvPr id="4" name="Content Placeholder 3"/>
           <p:cNvSpPr>
             <a:spLocks noGrp="1"/>
           </p:cNvSpPr>
@@ -1633,8 +1434,8 @@
         </p:nvSpPr>
         <p:spPr>
           <a:xfrm>
-            <a:off x="839788" y="2505075"/>
-            <a:ext cx="5157787" cy="3684588"/>
+            <a:off x="421972" y="1803422"/>
+            <a:ext cx="2591654" cy="2652562"/>
           </a:xfrm>
         </p:spPr>
         <p:txBody>
@@ -1674,19 +1475,13 @@
               <a:rPr lang="en-US"/>
               <a:t>Fifth level</a:t>
             </a:r>
-            <a:endParaRPr lang="en-DE"/>
-          </a:p>
-        </p:txBody>
-      </p:sp>
-      <p:sp>
-        <p:nvSpPr>
-          <p:cNvPr id="5" name="Text Placeholder 4">
-            <a:extLst>
-              <a:ext uri="{FF2B5EF4-FFF2-40B4-BE49-F238E27FC236}">
-                <a16:creationId xmlns:a16="http://schemas.microsoft.com/office/drawing/2014/main" id="{92461D69-A221-18D6-5B8A-1B4141779456}"/>
-              </a:ext>
-            </a:extLst>
-          </p:cNvPr>
+            <a:endParaRPr lang="en-US" dirty="0"/>
+          </a:p>
+        </p:txBody>
+      </p:sp>
+      <p:sp>
+        <p:nvSpPr>
+          <p:cNvPr id="5" name="Text Placeholder 4"/>
           <p:cNvSpPr>
             <a:spLocks noGrp="1"/>
           </p:cNvSpPr>
@@ -1696,8 +1491,8 @@
         </p:nvSpPr>
         <p:spPr>
           <a:xfrm>
-            <a:off x="6172200" y="1681163"/>
-            <a:ext cx="5183188" cy="823912"/>
+            <a:off x="3101370" y="1210282"/>
+            <a:ext cx="2604417" cy="593140"/>
           </a:xfrm>
         </p:spPr>
         <p:txBody>
@@ -1705,39 +1500,39 @@
           <a:lstStyle>
             <a:lvl1pPr marL="0" indent="0">
               <a:buNone/>
-              <a:defRPr sz="2400" b="1"/>
+              <a:defRPr sz="1608" b="1"/>
             </a:lvl1pPr>
-            <a:lvl2pPr marL="457200" indent="0">
-              <a:buNone/>
-              <a:defRPr sz="2000" b="1"/>
+            <a:lvl2pPr marL="306324" indent="0">
+              <a:buNone/>
+              <a:defRPr sz="1340" b="1"/>
             </a:lvl2pPr>
-            <a:lvl3pPr marL="914400" indent="0">
-              <a:buNone/>
-              <a:defRPr sz="1800" b="1"/>
+            <a:lvl3pPr marL="612648" indent="0">
+              <a:buNone/>
+              <a:defRPr sz="1206" b="1"/>
             </a:lvl3pPr>
-            <a:lvl4pPr marL="1371600" indent="0">
-              <a:buNone/>
-              <a:defRPr sz="1600" b="1"/>
+            <a:lvl4pPr marL="918972" indent="0">
+              <a:buNone/>
+              <a:defRPr sz="1072" b="1"/>
             </a:lvl4pPr>
-            <a:lvl5pPr marL="1828800" indent="0">
-              <a:buNone/>
-              <a:defRPr sz="1600" b="1"/>
+            <a:lvl5pPr marL="1225296" indent="0">
+              <a:buNone/>
+              <a:defRPr sz="1072" b="1"/>
             </a:lvl5pPr>
-            <a:lvl6pPr marL="2286000" indent="0">
-              <a:buNone/>
-              <a:defRPr sz="1600" b="1"/>
+            <a:lvl6pPr marL="1531620" indent="0">
+              <a:buNone/>
+              <a:defRPr sz="1072" b="1"/>
             </a:lvl6pPr>
-            <a:lvl7pPr marL="2743200" indent="0">
-              <a:buNone/>
-              <a:defRPr sz="1600" b="1"/>
+            <a:lvl7pPr marL="1837944" indent="0">
+              <a:buNone/>
+              <a:defRPr sz="1072" b="1"/>
             </a:lvl7pPr>
-            <a:lvl8pPr marL="3200400" indent="0">
-              <a:buNone/>
-              <a:defRPr sz="1600" b="1"/>
+            <a:lvl8pPr marL="2144268" indent="0">
+              <a:buNone/>
+              <a:defRPr sz="1072" b="1"/>
             </a:lvl8pPr>
-            <a:lvl9pPr marL="3657600" indent="0">
-              <a:buNone/>
-              <a:defRPr sz="1600" b="1"/>
+            <a:lvl9pPr marL="2450592" indent="0">
+              <a:buNone/>
+              <a:defRPr sz="1072" b="1"/>
             </a:lvl9pPr>
           </a:lstStyle>
           <a:p>
@@ -1751,13 +1546,7 @@
       </p:sp>
       <p:sp>
         <p:nvSpPr>
-          <p:cNvPr id="6" name="Content Placeholder 5">
-            <a:extLst>
-              <a:ext uri="{FF2B5EF4-FFF2-40B4-BE49-F238E27FC236}">
-                <a16:creationId xmlns:a16="http://schemas.microsoft.com/office/drawing/2014/main" id="{DAE3E7E4-5BEE-9C31-D2A8-BF01533E8507}"/>
-              </a:ext>
-            </a:extLst>
-          </p:cNvPr>
+          <p:cNvPr id="6" name="Content Placeholder 5"/>
           <p:cNvSpPr>
             <a:spLocks noGrp="1"/>
           </p:cNvSpPr>
@@ -1767,8 +1556,8 @@
         </p:nvSpPr>
         <p:spPr>
           <a:xfrm>
-            <a:off x="6172200" y="2505075"/>
-            <a:ext cx="5183188" cy="3684588"/>
+            <a:off x="3101370" y="1803422"/>
+            <a:ext cx="2604417" cy="2652562"/>
           </a:xfrm>
         </p:spPr>
         <p:txBody>
@@ -1808,19 +1597,13 @@
               <a:rPr lang="en-US"/>
               <a:t>Fifth level</a:t>
             </a:r>
-            <a:endParaRPr lang="en-DE"/>
-          </a:p>
-        </p:txBody>
-      </p:sp>
-      <p:sp>
-        <p:nvSpPr>
-          <p:cNvPr id="7" name="Date Placeholder 6">
-            <a:extLst>
-              <a:ext uri="{FF2B5EF4-FFF2-40B4-BE49-F238E27FC236}">
-                <a16:creationId xmlns:a16="http://schemas.microsoft.com/office/drawing/2014/main" id="{EEFC6639-48CC-5D58-F0B6-DDCCCBACA6B4}"/>
-              </a:ext>
-            </a:extLst>
-          </p:cNvPr>
+            <a:endParaRPr lang="en-US" dirty="0"/>
+          </a:p>
+        </p:txBody>
+      </p:sp>
+      <p:sp>
+        <p:nvSpPr>
+          <p:cNvPr id="7" name="Date Placeholder 6"/>
           <p:cNvSpPr>
             <a:spLocks noGrp="1"/>
           </p:cNvSpPr>
@@ -1835,7 +1618,7 @@
           <a:p>
             <a:fld id="{31560ECC-EA69-4449-9ACE-963B3EEBCA8A}" type="datetimeFigureOut">
               <a:rPr lang="en-DE" smtClean="0"/>
-              <a:t>31/05/2026</a:t>
+              <a:t>05/31/2026</a:t>
             </a:fld>
             <a:endParaRPr lang="en-DE"/>
           </a:p>
@@ -1843,13 +1626,7 @@
       </p:sp>
       <p:sp>
         <p:nvSpPr>
-          <p:cNvPr id="8" name="Footer Placeholder 7">
-            <a:extLst>
-              <a:ext uri="{FF2B5EF4-FFF2-40B4-BE49-F238E27FC236}">
-                <a16:creationId xmlns:a16="http://schemas.microsoft.com/office/drawing/2014/main" id="{2EDDE70E-A2C1-7597-92C0-61418CC5686B}"/>
-              </a:ext>
-            </a:extLst>
-          </p:cNvPr>
+          <p:cNvPr id="8" name="Footer Placeholder 7"/>
           <p:cNvSpPr>
             <a:spLocks noGrp="1"/>
           </p:cNvSpPr>
@@ -1868,13 +1645,7 @@
       </p:sp>
       <p:sp>
         <p:nvSpPr>
-          <p:cNvPr id="9" name="Slide Number Placeholder 8">
-            <a:extLst>
-              <a:ext uri="{FF2B5EF4-FFF2-40B4-BE49-F238E27FC236}">
-                <a16:creationId xmlns:a16="http://schemas.microsoft.com/office/drawing/2014/main" id="{8B8CAA42-A873-4D5D-82CB-60F722510192}"/>
-              </a:ext>
-            </a:extLst>
-          </p:cNvPr>
+          <p:cNvPr id="9" name="Slide Number Placeholder 8"/>
           <p:cNvSpPr>
             <a:spLocks noGrp="1"/>
           </p:cNvSpPr>
@@ -1898,7 +1669,7 @@
     </p:spTree>
     <p:extLst>
       <p:ext uri="{BB962C8B-B14F-4D97-AF65-F5344CB8AC3E}">
-        <p14:creationId xmlns:p14="http://schemas.microsoft.com/office/powerpoint/2010/main" val="961305668"/>
+        <p14:creationId xmlns:p14="http://schemas.microsoft.com/office/powerpoint/2010/main" val="3245825321"/>
       </p:ext>
     </p:extLst>
   </p:cSld>
@@ -1927,13 +1698,7 @@
       </p:grpSpPr>
       <p:sp>
         <p:nvSpPr>
-          <p:cNvPr id="2" name="Title 1">
-            <a:extLst>
-              <a:ext uri="{FF2B5EF4-FFF2-40B4-BE49-F238E27FC236}">
-                <a16:creationId xmlns:a16="http://schemas.microsoft.com/office/drawing/2014/main" id="{E36BE7CD-78F7-C6C4-53CC-4C1560BF5967}"/>
-              </a:ext>
-            </a:extLst>
-          </p:cNvPr>
+          <p:cNvPr id="2" name="Title 1"/>
           <p:cNvSpPr>
             <a:spLocks noGrp="1"/>
           </p:cNvSpPr>
@@ -1950,19 +1715,13 @@
               <a:rPr lang="en-US"/>
               <a:t>Click to edit Master title style</a:t>
             </a:r>
-            <a:endParaRPr lang="en-DE"/>
-          </a:p>
-        </p:txBody>
-      </p:sp>
-      <p:sp>
-        <p:nvSpPr>
-          <p:cNvPr id="3" name="Date Placeholder 2">
-            <a:extLst>
-              <a:ext uri="{FF2B5EF4-FFF2-40B4-BE49-F238E27FC236}">
-                <a16:creationId xmlns:a16="http://schemas.microsoft.com/office/drawing/2014/main" id="{DB7FBC56-B76F-5338-39CA-F40A6E636900}"/>
-              </a:ext>
-            </a:extLst>
-          </p:cNvPr>
+            <a:endParaRPr lang="en-US" dirty="0"/>
+          </a:p>
+        </p:txBody>
+      </p:sp>
+      <p:sp>
+        <p:nvSpPr>
+          <p:cNvPr id="3" name="Date Placeholder 2"/>
           <p:cNvSpPr>
             <a:spLocks noGrp="1"/>
           </p:cNvSpPr>
@@ -1977,7 +1736,7 @@
           <a:p>
             <a:fld id="{31560ECC-EA69-4449-9ACE-963B3EEBCA8A}" type="datetimeFigureOut">
               <a:rPr lang="en-DE" smtClean="0"/>
-              <a:t>31/05/2026</a:t>
+              <a:t>05/31/2026</a:t>
             </a:fld>
             <a:endParaRPr lang="en-DE"/>
           </a:p>
@@ -1985,13 +1744,7 @@
       </p:sp>
       <p:sp>
         <p:nvSpPr>
-          <p:cNvPr id="4" name="Footer Placeholder 3">
-            <a:extLst>
-              <a:ext uri="{FF2B5EF4-FFF2-40B4-BE49-F238E27FC236}">
-                <a16:creationId xmlns:a16="http://schemas.microsoft.com/office/drawing/2014/main" id="{8CD655FB-E30B-6B85-4CA8-169746331751}"/>
-              </a:ext>
-            </a:extLst>
-          </p:cNvPr>
+          <p:cNvPr id="4" name="Footer Placeholder 3"/>
           <p:cNvSpPr>
             <a:spLocks noGrp="1"/>
           </p:cNvSpPr>
@@ -2010,13 +1763,7 @@
       </p:sp>
       <p:sp>
         <p:nvSpPr>
-          <p:cNvPr id="5" name="Slide Number Placeholder 4">
-            <a:extLst>
-              <a:ext uri="{FF2B5EF4-FFF2-40B4-BE49-F238E27FC236}">
-                <a16:creationId xmlns:a16="http://schemas.microsoft.com/office/drawing/2014/main" id="{A2832DA2-9245-44D8-D8FC-6CA55C444B07}"/>
-              </a:ext>
-            </a:extLst>
-          </p:cNvPr>
+          <p:cNvPr id="5" name="Slide Number Placeholder 4"/>
           <p:cNvSpPr>
             <a:spLocks noGrp="1"/>
           </p:cNvSpPr>
@@ -2040,7 +1787,7 @@
     </p:spTree>
     <p:extLst>
       <p:ext uri="{BB962C8B-B14F-4D97-AF65-F5344CB8AC3E}">
-        <p14:creationId xmlns:p14="http://schemas.microsoft.com/office/powerpoint/2010/main" val="3335459087"/>
+        <p14:creationId xmlns:p14="http://schemas.microsoft.com/office/powerpoint/2010/main" val="1031927636"/>
       </p:ext>
     </p:extLst>
   </p:cSld>
@@ -2069,13 +1816,7 @@
       </p:grpSpPr>
       <p:sp>
         <p:nvSpPr>
-          <p:cNvPr id="2" name="Date Placeholder 1">
-            <a:extLst>
-              <a:ext uri="{FF2B5EF4-FFF2-40B4-BE49-F238E27FC236}">
-                <a16:creationId xmlns:a16="http://schemas.microsoft.com/office/drawing/2014/main" id="{D645F092-0B88-4F6C-5334-EB3B7930CF97}"/>
-              </a:ext>
-            </a:extLst>
-          </p:cNvPr>
+          <p:cNvPr id="2" name="Date Placeholder 1"/>
           <p:cNvSpPr>
             <a:spLocks noGrp="1"/>
           </p:cNvSpPr>
@@ -2090,7 +1831,7 @@
           <a:p>
             <a:fld id="{31560ECC-EA69-4449-9ACE-963B3EEBCA8A}" type="datetimeFigureOut">
               <a:rPr lang="en-DE" smtClean="0"/>
-              <a:t>31/05/2026</a:t>
+              <a:t>05/31/2026</a:t>
             </a:fld>
             <a:endParaRPr lang="en-DE"/>
           </a:p>
@@ -2098,13 +1839,7 @@
       </p:sp>
       <p:sp>
         <p:nvSpPr>
-          <p:cNvPr id="3" name="Footer Placeholder 2">
-            <a:extLst>
-              <a:ext uri="{FF2B5EF4-FFF2-40B4-BE49-F238E27FC236}">
-                <a16:creationId xmlns:a16="http://schemas.microsoft.com/office/drawing/2014/main" id="{402397C0-F28D-CC4E-AF16-53A445312EF2}"/>
-              </a:ext>
-            </a:extLst>
-          </p:cNvPr>
+          <p:cNvPr id="3" name="Footer Placeholder 2"/>
           <p:cNvSpPr>
             <a:spLocks noGrp="1"/>
           </p:cNvSpPr>
@@ -2123,13 +1858,7 @@
       </p:sp>
       <p:sp>
         <p:nvSpPr>
-          <p:cNvPr id="4" name="Slide Number Placeholder 3">
-            <a:extLst>
-              <a:ext uri="{FF2B5EF4-FFF2-40B4-BE49-F238E27FC236}">
-                <a16:creationId xmlns:a16="http://schemas.microsoft.com/office/drawing/2014/main" id="{429E70C6-990C-3C4D-5EC7-F1DA5BE79C82}"/>
-              </a:ext>
-            </a:extLst>
-          </p:cNvPr>
+          <p:cNvPr id="4" name="Slide Number Placeholder 3"/>
           <p:cNvSpPr>
             <a:spLocks noGrp="1"/>
           </p:cNvSpPr>
@@ -2153,7 +1882,7 @@
     </p:spTree>
     <p:extLst>
       <p:ext uri="{BB962C8B-B14F-4D97-AF65-F5344CB8AC3E}">
-        <p14:creationId xmlns:p14="http://schemas.microsoft.com/office/powerpoint/2010/main" val="1088104907"/>
+        <p14:creationId xmlns:p14="http://schemas.microsoft.com/office/powerpoint/2010/main" val="3521033087"/>
       </p:ext>
     </p:extLst>
   </p:cSld>
@@ -2182,13 +1911,7 @@
       </p:grpSpPr>
       <p:sp>
         <p:nvSpPr>
-          <p:cNvPr id="2" name="Title 1">
-            <a:extLst>
-              <a:ext uri="{FF2B5EF4-FFF2-40B4-BE49-F238E27FC236}">
-                <a16:creationId xmlns:a16="http://schemas.microsoft.com/office/drawing/2014/main" id="{CE2B944D-4E57-0E29-5920-2D888962A24A}"/>
-              </a:ext>
-            </a:extLst>
-          </p:cNvPr>
+          <p:cNvPr id="2" name="Title 1"/>
           <p:cNvSpPr>
             <a:spLocks noGrp="1"/>
           </p:cNvSpPr>
@@ -2198,15 +1921,15 @@
         </p:nvSpPr>
         <p:spPr>
           <a:xfrm>
-            <a:off x="839788" y="457200"/>
-            <a:ext cx="3932237" cy="1600200"/>
+            <a:off x="421972" y="329142"/>
+            <a:ext cx="1975847" cy="1151996"/>
           </a:xfrm>
         </p:spPr>
         <p:txBody>
           <a:bodyPr anchor="b"/>
           <a:lstStyle>
             <a:lvl1pPr>
-              <a:defRPr sz="3200"/>
+              <a:defRPr sz="2144"/>
             </a:lvl1pPr>
           </a:lstStyle>
           <a:p>
@@ -2214,19 +1937,13 @@
               <a:rPr lang="en-US"/>
               <a:t>Click to edit Master title style</a:t>
             </a:r>
-            <a:endParaRPr lang="en-DE"/>
-          </a:p>
-        </p:txBody>
-      </p:sp>
-      <p:sp>
-        <p:nvSpPr>
-          <p:cNvPr id="3" name="Content Placeholder 2">
-            <a:extLst>
-              <a:ext uri="{FF2B5EF4-FFF2-40B4-BE49-F238E27FC236}">
-                <a16:creationId xmlns:a16="http://schemas.microsoft.com/office/drawing/2014/main" id="{1F65A7B6-6361-84AC-26B8-775D69CB7C73}"/>
-              </a:ext>
-            </a:extLst>
-          </p:cNvPr>
+            <a:endParaRPr lang="en-US" dirty="0"/>
+          </a:p>
+        </p:txBody>
+      </p:sp>
+      <p:sp>
+        <p:nvSpPr>
+          <p:cNvPr id="3" name="Content Placeholder 2"/>
           <p:cNvSpPr>
             <a:spLocks noGrp="1"/>
           </p:cNvSpPr>
@@ -2236,39 +1953,39 @@
         </p:nvSpPr>
         <p:spPr>
           <a:xfrm>
-            <a:off x="5183188" y="987425"/>
-            <a:ext cx="6172200" cy="4873625"/>
+            <a:off x="2604417" y="710856"/>
+            <a:ext cx="3101370" cy="3508559"/>
           </a:xfrm>
         </p:spPr>
         <p:txBody>
           <a:bodyPr/>
           <a:lstStyle>
             <a:lvl1pPr>
-              <a:defRPr sz="3200"/>
+              <a:defRPr sz="2144"/>
             </a:lvl1pPr>
             <a:lvl2pPr>
-              <a:defRPr sz="2800"/>
+              <a:defRPr sz="1876"/>
             </a:lvl2pPr>
             <a:lvl3pPr>
-              <a:defRPr sz="2400"/>
+              <a:defRPr sz="1608"/>
             </a:lvl3pPr>
             <a:lvl4pPr>
-              <a:defRPr sz="2000"/>
+              <a:defRPr sz="1340"/>
             </a:lvl4pPr>
             <a:lvl5pPr>
-              <a:defRPr sz="2000"/>
+              <a:defRPr sz="1340"/>
             </a:lvl5pPr>
             <a:lvl6pPr>
-              <a:defRPr sz="2000"/>
+              <a:defRPr sz="1340"/>
             </a:lvl6pPr>
             <a:lvl7pPr>
-              <a:defRPr sz="2000"/>
+              <a:defRPr sz="1340"/>
             </a:lvl7pPr>
             <a:lvl8pPr>
-              <a:defRPr sz="2000"/>
+              <a:defRPr sz="1340"/>
             </a:lvl8pPr>
             <a:lvl9pPr>
-              <a:defRPr sz="2000"/>
+              <a:defRPr sz="1340"/>
             </a:lvl9pPr>
           </a:lstStyle>
           <a:p>
@@ -2305,19 +2022,13 @@
               <a:rPr lang="en-US"/>
               <a:t>Fifth level</a:t>
             </a:r>
-            <a:endParaRPr lang="en-DE"/>
-          </a:p>
-        </p:txBody>
-      </p:sp>
-      <p:sp>
-        <p:nvSpPr>
-          <p:cNvPr id="4" name="Text Placeholder 3">
-            <a:extLst>
-              <a:ext uri="{FF2B5EF4-FFF2-40B4-BE49-F238E27FC236}">
-                <a16:creationId xmlns:a16="http://schemas.microsoft.com/office/drawing/2014/main" id="{4E9F307F-64C9-8D74-2681-8D9FA11F3637}"/>
-              </a:ext>
-            </a:extLst>
-          </p:cNvPr>
+            <a:endParaRPr lang="en-US" dirty="0"/>
+          </a:p>
+        </p:txBody>
+      </p:sp>
+      <p:sp>
+        <p:nvSpPr>
+          <p:cNvPr id="4" name="Text Placeholder 3"/>
           <p:cNvSpPr>
             <a:spLocks noGrp="1"/>
           </p:cNvSpPr>
@@ -2327,8 +2038,8 @@
         </p:nvSpPr>
         <p:spPr>
           <a:xfrm>
-            <a:off x="839788" y="2057400"/>
-            <a:ext cx="3932237" cy="3811588"/>
+            <a:off x="421972" y="1481138"/>
+            <a:ext cx="1975847" cy="2743990"/>
           </a:xfrm>
         </p:spPr>
         <p:txBody>
@@ -2336,39 +2047,39 @@
           <a:lstStyle>
             <a:lvl1pPr marL="0" indent="0">
               <a:buNone/>
-              <a:defRPr sz="1600"/>
+              <a:defRPr sz="1072"/>
             </a:lvl1pPr>
-            <a:lvl2pPr marL="457200" indent="0">
-              <a:buNone/>
-              <a:defRPr sz="1400"/>
+            <a:lvl2pPr marL="306324" indent="0">
+              <a:buNone/>
+              <a:defRPr sz="938"/>
             </a:lvl2pPr>
-            <a:lvl3pPr marL="914400" indent="0">
-              <a:buNone/>
-              <a:defRPr sz="1200"/>
+            <a:lvl3pPr marL="612648" indent="0">
+              <a:buNone/>
+              <a:defRPr sz="804"/>
             </a:lvl3pPr>
-            <a:lvl4pPr marL="1371600" indent="0">
-              <a:buNone/>
-              <a:defRPr sz="1000"/>
+            <a:lvl4pPr marL="918972" indent="0">
+              <a:buNone/>
+              <a:defRPr sz="670"/>
             </a:lvl4pPr>
-            <a:lvl5pPr marL="1828800" indent="0">
-              <a:buNone/>
-              <a:defRPr sz="1000"/>
+            <a:lvl5pPr marL="1225296" indent="0">
+              <a:buNone/>
+              <a:defRPr sz="670"/>
             </a:lvl5pPr>
-            <a:lvl6pPr marL="2286000" indent="0">
-              <a:buNone/>
-              <a:defRPr sz="1000"/>
+            <a:lvl6pPr marL="1531620" indent="0">
+              <a:buNone/>
+              <a:defRPr sz="670"/>
             </a:lvl6pPr>
-            <a:lvl7pPr marL="2743200" indent="0">
-              <a:buNone/>
-              <a:defRPr sz="1000"/>
+            <a:lvl7pPr marL="1837944" indent="0">
+              <a:buNone/>
+              <a:defRPr sz="670"/>
             </a:lvl7pPr>
-            <a:lvl8pPr marL="3200400" indent="0">
-              <a:buNone/>
-              <a:defRPr sz="1000"/>
+            <a:lvl8pPr marL="2144268" indent="0">
+              <a:buNone/>
+              <a:defRPr sz="670"/>
             </a:lvl8pPr>
-            <a:lvl9pPr marL="3657600" indent="0">
-              <a:buNone/>
-              <a:defRPr sz="1000"/>
+            <a:lvl9pPr marL="2450592" indent="0">
+              <a:buNone/>
+              <a:defRPr sz="670"/>
             </a:lvl9pPr>
           </a:lstStyle>
           <a:p>
@@ -2382,13 +2093,7 @@
       </p:sp>
       <p:sp>
         <p:nvSpPr>
-          <p:cNvPr id="5" name="Date Placeholder 4">
-            <a:extLst>
-              <a:ext uri="{FF2B5EF4-FFF2-40B4-BE49-F238E27FC236}">
-                <a16:creationId xmlns:a16="http://schemas.microsoft.com/office/drawing/2014/main" id="{CF17540C-1C0A-AD7C-DC41-B546CFE070A6}"/>
-              </a:ext>
-            </a:extLst>
-          </p:cNvPr>
+          <p:cNvPr id="5" name="Date Placeholder 4"/>
           <p:cNvSpPr>
             <a:spLocks noGrp="1"/>
           </p:cNvSpPr>
@@ -2403,7 +2108,7 @@
           <a:p>
             <a:fld id="{31560ECC-EA69-4449-9ACE-963B3EEBCA8A}" type="datetimeFigureOut">
               <a:rPr lang="en-DE" smtClean="0"/>
-              <a:t>31/05/2026</a:t>
+              <a:t>05/31/2026</a:t>
             </a:fld>
             <a:endParaRPr lang="en-DE"/>
           </a:p>
@@ -2411,13 +2116,7 @@
       </p:sp>
       <p:sp>
         <p:nvSpPr>
-          <p:cNvPr id="6" name="Footer Placeholder 5">
-            <a:extLst>
-              <a:ext uri="{FF2B5EF4-FFF2-40B4-BE49-F238E27FC236}">
-                <a16:creationId xmlns:a16="http://schemas.microsoft.com/office/drawing/2014/main" id="{632FA549-02CA-F598-D89A-B0A4D6EE3D69}"/>
-              </a:ext>
-            </a:extLst>
-          </p:cNvPr>
+          <p:cNvPr id="6" name="Footer Placeholder 5"/>
           <p:cNvSpPr>
             <a:spLocks noGrp="1"/>
           </p:cNvSpPr>
@@ -2436,13 +2135,7 @@
       </p:sp>
       <p:sp>
         <p:nvSpPr>
-          <p:cNvPr id="7" name="Slide Number Placeholder 6">
-            <a:extLst>
-              <a:ext uri="{FF2B5EF4-FFF2-40B4-BE49-F238E27FC236}">
-                <a16:creationId xmlns:a16="http://schemas.microsoft.com/office/drawing/2014/main" id="{3111D40C-FF14-139A-7EE3-7D4E4FD0CD06}"/>
-              </a:ext>
-            </a:extLst>
-          </p:cNvPr>
+          <p:cNvPr id="7" name="Slide Number Placeholder 6"/>
           <p:cNvSpPr>
             <a:spLocks noGrp="1"/>
           </p:cNvSpPr>
@@ -2466,7 +2159,7 @@
     </p:spTree>
     <p:extLst>
       <p:ext uri="{BB962C8B-B14F-4D97-AF65-F5344CB8AC3E}">
-        <p14:creationId xmlns:p14="http://schemas.microsoft.com/office/powerpoint/2010/main" val="1045632983"/>
+        <p14:creationId xmlns:p14="http://schemas.microsoft.com/office/powerpoint/2010/main" val="1078628715"/>
       </p:ext>
     </p:extLst>
   </p:cSld>
@@ -2495,13 +2188,7 @@
       </p:grpSpPr>
       <p:sp>
         <p:nvSpPr>
-          <p:cNvPr id="2" name="Title 1">
-            <a:extLst>
-              <a:ext uri="{FF2B5EF4-FFF2-40B4-BE49-F238E27FC236}">
-                <a16:creationId xmlns:a16="http://schemas.microsoft.com/office/drawing/2014/main" id="{69F47AD1-31E8-C819-1A96-4180CC034A02}"/>
-              </a:ext>
-            </a:extLst>
-          </p:cNvPr>
+          <p:cNvPr id="2" name="Title 1"/>
           <p:cNvSpPr>
             <a:spLocks noGrp="1"/>
           </p:cNvSpPr>
@@ -2511,15 +2198,15 @@
         </p:nvSpPr>
         <p:spPr>
           <a:xfrm>
-            <a:off x="839788" y="457200"/>
-            <a:ext cx="3932237" cy="1600200"/>
+            <a:off x="421972" y="329142"/>
+            <a:ext cx="1975847" cy="1151996"/>
           </a:xfrm>
         </p:spPr>
         <p:txBody>
           <a:bodyPr anchor="b"/>
           <a:lstStyle>
             <a:lvl1pPr>
-              <a:defRPr sz="3200"/>
+              <a:defRPr sz="2144"/>
             </a:lvl1pPr>
           </a:lstStyle>
           <a:p>
@@ -2527,21 +2214,15 @@
               <a:rPr lang="en-US"/>
               <a:t>Click to edit Master title style</a:t>
             </a:r>
-            <a:endParaRPr lang="en-DE"/>
-          </a:p>
-        </p:txBody>
-      </p:sp>
-      <p:sp>
-        <p:nvSpPr>
-          <p:cNvPr id="3" name="Picture Placeholder 2">
-            <a:extLst>
-              <a:ext uri="{FF2B5EF4-FFF2-40B4-BE49-F238E27FC236}">
-                <a16:creationId xmlns:a16="http://schemas.microsoft.com/office/drawing/2014/main" id="{03021CFD-AF56-EECA-2AA7-B4051816C592}"/>
-              </a:ext>
-            </a:extLst>
-          </p:cNvPr>
-          <p:cNvSpPr>
-            <a:spLocks noGrp="1"/>
+            <a:endParaRPr lang="en-US" dirty="0"/>
+          </a:p>
+        </p:txBody>
+      </p:sp>
+      <p:sp>
+        <p:nvSpPr>
+          <p:cNvPr id="3" name="Picture Placeholder 2"/>
+          <p:cNvSpPr>
+            <a:spLocks noGrp="1" noChangeAspect="1"/>
           </p:cNvSpPr>
           <p:nvPr>
             <p:ph type="pic" idx="1"/>
@@ -2549,64 +2230,62 @@
         </p:nvSpPr>
         <p:spPr>
           <a:xfrm>
-            <a:off x="5183188" y="987425"/>
-            <a:ext cx="6172200" cy="4873625"/>
+            <a:off x="2604417" y="710856"/>
+            <a:ext cx="3101370" cy="3508559"/>
           </a:xfrm>
         </p:spPr>
         <p:txBody>
-          <a:bodyPr/>
+          <a:bodyPr anchor="t"/>
           <a:lstStyle>
             <a:lvl1pPr marL="0" indent="0">
               <a:buNone/>
-              <a:defRPr sz="3200"/>
+              <a:defRPr sz="2144"/>
             </a:lvl1pPr>
-            <a:lvl2pPr marL="457200" indent="0">
-              <a:buNone/>
-              <a:defRPr sz="2800"/>
+            <a:lvl2pPr marL="306324" indent="0">
+              <a:buNone/>
+              <a:defRPr sz="1876"/>
             </a:lvl2pPr>
-            <a:lvl3pPr marL="914400" indent="0">
-              <a:buNone/>
-              <a:defRPr sz="2400"/>
+            <a:lvl3pPr marL="612648" indent="0">
+              <a:buNone/>
+              <a:defRPr sz="1608"/>
             </a:lvl3pPr>
-            <a:lvl4pPr marL="1371600" indent="0">
-              <a:buNone/>
-              <a:defRPr sz="2000"/>
+            <a:lvl4pPr marL="918972" indent="0">
+              <a:buNone/>
+              <a:defRPr sz="1340"/>
             </a:lvl4pPr>
-            <a:lvl5pPr marL="1828800" indent="0">
-              <a:buNone/>
-              <a:defRPr sz="2000"/>
+            <a:lvl5pPr marL="1225296" indent="0">
+              <a:buNone/>
+              <a:defRPr sz="1340"/>
             </a:lvl5pPr>
-            <a:lvl6pPr marL="2286000" indent="0">
-              <a:buNone/>
-              <a:defRPr sz="2000"/>
+            <a:lvl6pPr marL="1531620" indent="0">
+              <a:buNone/>
+              <a:defRPr sz="1340"/>
             </a:lvl6pPr>
-            <a:lvl7pPr marL="2743200" indent="0">
-              <a:buNone/>
-              <a:defRPr sz="2000"/>
+            <a:lvl7pPr marL="1837944" indent="0">
+              <a:buNone/>
+              <a:defRPr sz="1340"/>
             </a:lvl7pPr>
-            <a:lvl8pPr marL="3200400" indent="0">
-              <a:buNone/>
-              <a:defRPr sz="2000"/>
+            <a:lvl8pPr marL="2144268" indent="0">
+              <a:buNone/>
+              <a:defRPr sz="1340"/>
             </a:lvl8pPr>
-            <a:lvl9pPr marL="3657600" indent="0">
-              <a:buNone/>
-              <a:defRPr sz="2000"/>
+            <a:lvl9pPr marL="2450592" indent="0">
+              <a:buNone/>
+              <a:defRPr sz="1340"/>
             </a:lvl9pPr>
           </a:lstStyle>
           <a:p>
-            <a:endParaRPr lang="en-DE"/>
-          </a:p>
-        </p:txBody>
-      </p:sp>
-      <p:sp>
-        <p:nvSpPr>
-          <p:cNvPr id="4" name="Text Placeholder 3">
-            <a:extLst>
-              <a:ext uri="{FF2B5EF4-FFF2-40B4-BE49-F238E27FC236}">
-                <a16:creationId xmlns:a16="http://schemas.microsoft.com/office/drawing/2014/main" id="{662782C0-312A-D315-BF5F-B32B611AEB01}"/>
-              </a:ext>
-            </a:extLst>
-          </p:cNvPr>
+            <a:r>
+              <a:rPr lang="en-US"/>
+              <a:t>Click icon to add picture</a:t>
+            </a:r>
+            <a:endParaRPr lang="en-US" dirty="0"/>
+          </a:p>
+        </p:txBody>
+      </p:sp>
+      <p:sp>
+        <p:nvSpPr>
+          <p:cNvPr id="4" name="Text Placeholder 3"/>
           <p:cNvSpPr>
             <a:spLocks noGrp="1"/>
           </p:cNvSpPr>
@@ -2616,8 +2295,8 @@
         </p:nvSpPr>
         <p:spPr>
           <a:xfrm>
-            <a:off x="839788" y="2057400"/>
-            <a:ext cx="3932237" cy="3811588"/>
+            <a:off x="421972" y="1481138"/>
+            <a:ext cx="1975847" cy="2743990"/>
           </a:xfrm>
         </p:spPr>
         <p:txBody>
@@ -2625,39 +2304,39 @@
           <a:lstStyle>
             <a:lvl1pPr marL="0" indent="0">
               <a:buNone/>
-              <a:defRPr sz="1600"/>
+              <a:defRPr sz="1072"/>
             </a:lvl1pPr>
-            <a:lvl2pPr marL="457200" indent="0">
-              <a:buNone/>
-              <a:defRPr sz="1400"/>
+            <a:lvl2pPr marL="306324" indent="0">
+              <a:buNone/>
+              <a:defRPr sz="938"/>
             </a:lvl2pPr>
-            <a:lvl3pPr marL="914400" indent="0">
-              <a:buNone/>
-              <a:defRPr sz="1200"/>
+            <a:lvl3pPr marL="612648" indent="0">
+              <a:buNone/>
+              <a:defRPr sz="804"/>
             </a:lvl3pPr>
-            <a:lvl4pPr marL="1371600" indent="0">
-              <a:buNone/>
-              <a:defRPr sz="1000"/>
+            <a:lvl4pPr marL="918972" indent="0">
+              <a:buNone/>
+              <a:defRPr sz="670"/>
             </a:lvl4pPr>
-            <a:lvl5pPr marL="1828800" indent="0">
-              <a:buNone/>
-              <a:defRPr sz="1000"/>
+            <a:lvl5pPr marL="1225296" indent="0">
+              <a:buNone/>
+              <a:defRPr sz="670"/>
             </a:lvl5pPr>
-            <a:lvl6pPr marL="2286000" indent="0">
-              <a:buNone/>
-              <a:defRPr sz="1000"/>
+            <a:lvl6pPr marL="1531620" indent="0">
+              <a:buNone/>
+              <a:defRPr sz="670"/>
             </a:lvl6pPr>
-            <a:lvl7pPr marL="2743200" indent="0">
-              <a:buNone/>
-              <a:defRPr sz="1000"/>
+            <a:lvl7pPr marL="1837944" indent="0">
+              <a:buNone/>
+              <a:defRPr sz="670"/>
             </a:lvl7pPr>
-            <a:lvl8pPr marL="3200400" indent="0">
-              <a:buNone/>
-              <a:defRPr sz="1000"/>
+            <a:lvl8pPr marL="2144268" indent="0">
+              <a:buNone/>
+              <a:defRPr sz="670"/>
             </a:lvl8pPr>
-            <a:lvl9pPr marL="3657600" indent="0">
-              <a:buNone/>
-              <a:defRPr sz="1000"/>
+            <a:lvl9pPr marL="2450592" indent="0">
+              <a:buNone/>
+              <a:defRPr sz="670"/>
             </a:lvl9pPr>
           </a:lstStyle>
           <a:p>
@@ -2671,13 +2350,7 @@
       </p:sp>
       <p:sp>
         <p:nvSpPr>
-          <p:cNvPr id="5" name="Date Placeholder 4">
-            <a:extLst>
-              <a:ext uri="{FF2B5EF4-FFF2-40B4-BE49-F238E27FC236}">
-                <a16:creationId xmlns:a16="http://schemas.microsoft.com/office/drawing/2014/main" id="{5E300D3C-ADDE-F6CA-F699-D806EDA9C59C}"/>
-              </a:ext>
-            </a:extLst>
-          </p:cNvPr>
+          <p:cNvPr id="5" name="Date Placeholder 4"/>
           <p:cNvSpPr>
             <a:spLocks noGrp="1"/>
           </p:cNvSpPr>
@@ -2692,7 +2365,7 @@
           <a:p>
             <a:fld id="{31560ECC-EA69-4449-9ACE-963B3EEBCA8A}" type="datetimeFigureOut">
               <a:rPr lang="en-DE" smtClean="0"/>
-              <a:t>31/05/2026</a:t>
+              <a:t>05/31/2026</a:t>
             </a:fld>
             <a:endParaRPr lang="en-DE"/>
           </a:p>
@@ -2700,13 +2373,7 @@
       </p:sp>
       <p:sp>
         <p:nvSpPr>
-          <p:cNvPr id="6" name="Footer Placeholder 5">
-            <a:extLst>
-              <a:ext uri="{FF2B5EF4-FFF2-40B4-BE49-F238E27FC236}">
-                <a16:creationId xmlns:a16="http://schemas.microsoft.com/office/drawing/2014/main" id="{AD44320B-9D51-64A1-143D-582C550B9CE3}"/>
-              </a:ext>
-            </a:extLst>
-          </p:cNvPr>
+          <p:cNvPr id="6" name="Footer Placeholder 5"/>
           <p:cNvSpPr>
             <a:spLocks noGrp="1"/>
           </p:cNvSpPr>
@@ -2725,13 +2392,7 @@
       </p:sp>
       <p:sp>
         <p:nvSpPr>
-          <p:cNvPr id="7" name="Slide Number Placeholder 6">
-            <a:extLst>
-              <a:ext uri="{FF2B5EF4-FFF2-40B4-BE49-F238E27FC236}">
-                <a16:creationId xmlns:a16="http://schemas.microsoft.com/office/drawing/2014/main" id="{4317A26D-0F65-2EA3-F85E-2CB5D3928A97}"/>
-              </a:ext>
-            </a:extLst>
-          </p:cNvPr>
+          <p:cNvPr id="7" name="Slide Number Placeholder 6"/>
           <p:cNvSpPr>
             <a:spLocks noGrp="1"/>
           </p:cNvSpPr>
@@ -2755,7 +2416,7 @@
     </p:spTree>
     <p:extLst>
       <p:ext uri="{BB962C8B-B14F-4D97-AF65-F5344CB8AC3E}">
-        <p14:creationId xmlns:p14="http://schemas.microsoft.com/office/powerpoint/2010/main" val="1172790681"/>
+        <p14:creationId xmlns:p14="http://schemas.microsoft.com/office/powerpoint/2010/main" val="425663144"/>
       </p:ext>
     </p:extLst>
   </p:cSld>
@@ -2789,13 +2450,7 @@
       </p:grpSpPr>
       <p:sp>
         <p:nvSpPr>
-          <p:cNvPr id="2" name="Title Placeholder 1">
-            <a:extLst>
-              <a:ext uri="{FF2B5EF4-FFF2-40B4-BE49-F238E27FC236}">
-                <a16:creationId xmlns:a16="http://schemas.microsoft.com/office/drawing/2014/main" id="{696ECE80-A252-9551-5222-8307DE6F832B}"/>
-              </a:ext>
-            </a:extLst>
-          </p:cNvPr>
+          <p:cNvPr id="2" name="Title Placeholder 1"/>
           <p:cNvSpPr>
             <a:spLocks noGrp="1"/>
           </p:cNvSpPr>
@@ -2805,8 +2460,8 @@
         </p:nvSpPr>
         <p:spPr>
           <a:xfrm>
-            <a:off x="838200" y="365125"/>
-            <a:ext cx="10515600" cy="1325563"/>
+            <a:off x="421174" y="262857"/>
+            <a:ext cx="5283816" cy="954283"/>
           </a:xfrm>
           <a:prstGeom prst="rect">
             <a:avLst/>
@@ -2822,19 +2477,13 @@
               <a:rPr lang="en-US"/>
               <a:t>Click to edit Master title style</a:t>
             </a:r>
-            <a:endParaRPr lang="en-DE"/>
-          </a:p>
-        </p:txBody>
-      </p:sp>
-      <p:sp>
-        <p:nvSpPr>
-          <p:cNvPr id="3" name="Text Placeholder 2">
-            <a:extLst>
-              <a:ext uri="{FF2B5EF4-FFF2-40B4-BE49-F238E27FC236}">
-                <a16:creationId xmlns:a16="http://schemas.microsoft.com/office/drawing/2014/main" id="{83836570-EEAD-1489-7A3E-15FFECD97161}"/>
-              </a:ext>
-            </a:extLst>
-          </p:cNvPr>
+            <a:endParaRPr lang="en-US" dirty="0"/>
+          </a:p>
+        </p:txBody>
+      </p:sp>
+      <p:sp>
+        <p:nvSpPr>
+          <p:cNvPr id="3" name="Text Placeholder 2"/>
           <p:cNvSpPr>
             <a:spLocks noGrp="1"/>
           </p:cNvSpPr>
@@ -2844,8 +2493,8 @@
         </p:nvSpPr>
         <p:spPr>
           <a:xfrm>
-            <a:off x="838200" y="1825625"/>
-            <a:ext cx="10515600" cy="4351338"/>
+            <a:off x="421174" y="1314281"/>
+            <a:ext cx="5283816" cy="3132560"/>
           </a:xfrm>
           <a:prstGeom prst="rect">
             <a:avLst/>
@@ -2890,19 +2539,13 @@
               <a:rPr lang="en-US"/>
               <a:t>Fifth level</a:t>
             </a:r>
-            <a:endParaRPr lang="en-DE"/>
-          </a:p>
-        </p:txBody>
-      </p:sp>
-      <p:sp>
-        <p:nvSpPr>
-          <p:cNvPr id="4" name="Date Placeholder 3">
-            <a:extLst>
-              <a:ext uri="{FF2B5EF4-FFF2-40B4-BE49-F238E27FC236}">
-                <a16:creationId xmlns:a16="http://schemas.microsoft.com/office/drawing/2014/main" id="{B72914DC-A4F2-74D8-E9AF-5C2AA005E5B6}"/>
-              </a:ext>
-            </a:extLst>
-          </p:cNvPr>
+            <a:endParaRPr lang="en-US" dirty="0"/>
+          </a:p>
+        </p:txBody>
+      </p:sp>
+      <p:sp>
+        <p:nvSpPr>
+          <p:cNvPr id="4" name="Date Placeholder 3"/>
           <p:cNvSpPr>
             <a:spLocks noGrp="1"/>
           </p:cNvSpPr>
@@ -2912,8 +2555,8 @@
         </p:nvSpPr>
         <p:spPr>
           <a:xfrm>
-            <a:off x="838200" y="6356350"/>
-            <a:ext cx="2743200" cy="365125"/>
+            <a:off x="421174" y="4575985"/>
+            <a:ext cx="1378387" cy="262856"/>
           </a:xfrm>
           <a:prstGeom prst="rect">
             <a:avLst/>
@@ -2923,7 +2566,7 @@
           <a:bodyPr vert="horz" lIns="91440" tIns="45720" rIns="91440" bIns="45720" rtlCol="0" anchor="ctr"/>
           <a:lstStyle>
             <a:lvl1pPr algn="l">
-              <a:defRPr sz="1200">
+              <a:defRPr sz="804">
                 <a:solidFill>
                   <a:schemeClr val="tx1">
                     <a:tint val="82000"/>
@@ -2935,7 +2578,7 @@
           <a:p>
             <a:fld id="{31560ECC-EA69-4449-9ACE-963B3EEBCA8A}" type="datetimeFigureOut">
               <a:rPr lang="en-DE" smtClean="0"/>
-              <a:t>31/05/2026</a:t>
+              <a:t>05/31/2026</a:t>
             </a:fld>
             <a:endParaRPr lang="en-DE"/>
           </a:p>
@@ -2943,13 +2586,7 @@
       </p:sp>
       <p:sp>
         <p:nvSpPr>
-          <p:cNvPr id="5" name="Footer Placeholder 4">
-            <a:extLst>
-              <a:ext uri="{FF2B5EF4-FFF2-40B4-BE49-F238E27FC236}">
-                <a16:creationId xmlns:a16="http://schemas.microsoft.com/office/drawing/2014/main" id="{273D458D-43B7-F3E1-3312-5C7C7B57385B}"/>
-              </a:ext>
-            </a:extLst>
-          </p:cNvPr>
+          <p:cNvPr id="5" name="Footer Placeholder 4"/>
           <p:cNvSpPr>
             <a:spLocks noGrp="1"/>
           </p:cNvSpPr>
@@ -2959,8 +2596,8 @@
         </p:nvSpPr>
         <p:spPr>
           <a:xfrm>
-            <a:off x="4038600" y="6356350"/>
-            <a:ext cx="4114800" cy="365125"/>
+            <a:off x="2029292" y="4575985"/>
+            <a:ext cx="2067580" cy="262856"/>
           </a:xfrm>
           <a:prstGeom prst="rect">
             <a:avLst/>
@@ -2970,7 +2607,7 @@
           <a:bodyPr vert="horz" lIns="91440" tIns="45720" rIns="91440" bIns="45720" rtlCol="0" anchor="ctr"/>
           <a:lstStyle>
             <a:lvl1pPr algn="ctr">
-              <a:defRPr sz="1200">
+              <a:defRPr sz="804">
                 <a:solidFill>
                   <a:schemeClr val="tx1">
                     <a:tint val="82000"/>
@@ -2986,13 +2623,7 @@
       </p:sp>
       <p:sp>
         <p:nvSpPr>
-          <p:cNvPr id="6" name="Slide Number Placeholder 5">
-            <a:extLst>
-              <a:ext uri="{FF2B5EF4-FFF2-40B4-BE49-F238E27FC236}">
-                <a16:creationId xmlns:a16="http://schemas.microsoft.com/office/drawing/2014/main" id="{664BB95D-9916-3C68-6BAD-3EE75D06788B}"/>
-              </a:ext>
-            </a:extLst>
-          </p:cNvPr>
+          <p:cNvPr id="6" name="Slide Number Placeholder 5"/>
           <p:cNvSpPr>
             <a:spLocks noGrp="1"/>
           </p:cNvSpPr>
@@ -3002,8 +2633,8 @@
         </p:nvSpPr>
         <p:spPr>
           <a:xfrm>
-            <a:off x="8610600" y="6356350"/>
-            <a:ext cx="2743200" cy="365125"/>
+            <a:off x="4326602" y="4575985"/>
+            <a:ext cx="1378387" cy="262856"/>
           </a:xfrm>
           <a:prstGeom prst="rect">
             <a:avLst/>
@@ -3013,7 +2644,7 @@
           <a:bodyPr vert="horz" lIns="91440" tIns="45720" rIns="91440" bIns="45720" rtlCol="0" anchor="ctr"/>
           <a:lstStyle>
             <a:lvl1pPr algn="r">
-              <a:defRPr sz="1200">
+              <a:defRPr sz="804">
                 <a:solidFill>
                   <a:schemeClr val="tx1">
                     <a:tint val="82000"/>
@@ -3034,27 +2665,27 @@
     </p:spTree>
     <p:extLst>
       <p:ext uri="{BB962C8B-B14F-4D97-AF65-F5344CB8AC3E}">
-        <p14:creationId xmlns:p14="http://schemas.microsoft.com/office/powerpoint/2010/main" val="3959463459"/>
+        <p14:creationId xmlns:p14="http://schemas.microsoft.com/office/powerpoint/2010/main" val="3314964302"/>
       </p:ext>
     </p:extLst>
   </p:cSld>
   <p:clrMap bg1="lt1" tx1="dk1" bg2="lt2" tx2="dk2" accent1="accent1" accent2="accent2" accent3="accent3" accent4="accent4" accent5="accent5" accent6="accent6" hlink="hlink" folHlink="folHlink"/>
   <p:sldLayoutIdLst>
-    <p:sldLayoutId id="2147483649" r:id="rId1"/>
-    <p:sldLayoutId id="2147483650" r:id="rId2"/>
-    <p:sldLayoutId id="2147483651" r:id="rId3"/>
-    <p:sldLayoutId id="2147483652" r:id="rId4"/>
-    <p:sldLayoutId id="2147483653" r:id="rId5"/>
-    <p:sldLayoutId id="2147483654" r:id="rId6"/>
-    <p:sldLayoutId id="2147483655" r:id="rId7"/>
-    <p:sldLayoutId id="2147483656" r:id="rId8"/>
-    <p:sldLayoutId id="2147483657" r:id="rId9"/>
-    <p:sldLayoutId id="2147483658" r:id="rId10"/>
-    <p:sldLayoutId id="2147483659" r:id="rId11"/>
+    <p:sldLayoutId id="2147483757" r:id="rId1"/>
+    <p:sldLayoutId id="2147483758" r:id="rId2"/>
+    <p:sldLayoutId id="2147483759" r:id="rId3"/>
+    <p:sldLayoutId id="2147483760" r:id="rId4"/>
+    <p:sldLayoutId id="2147483761" r:id="rId5"/>
+    <p:sldLayoutId id="2147483762" r:id="rId6"/>
+    <p:sldLayoutId id="2147483763" r:id="rId7"/>
+    <p:sldLayoutId id="2147483764" r:id="rId8"/>
+    <p:sldLayoutId id="2147483765" r:id="rId9"/>
+    <p:sldLayoutId id="2147483766" r:id="rId10"/>
+    <p:sldLayoutId id="2147483767" r:id="rId11"/>
   </p:sldLayoutIdLst>
   <p:txStyles>
     <p:titleStyle>
-      <a:lvl1pPr algn="l" defTabSz="914400" rtl="0" eaLnBrk="1" latinLnBrk="0" hangingPunct="1">
+      <a:lvl1pPr algn="l" defTabSz="612648" rtl="0" eaLnBrk="1" latinLnBrk="0" hangingPunct="1">
         <a:lnSpc>
           <a:spcPct val="90000"/>
         </a:lnSpc>
@@ -3062,7 +2693,7 @@
           <a:spcPct val="0"/>
         </a:spcBef>
         <a:buNone/>
-        <a:defRPr sz="4400" kern="1200">
+        <a:defRPr sz="2948" kern="1200">
           <a:solidFill>
             <a:schemeClr val="tx1"/>
           </a:solidFill>
@@ -3073,16 +2704,16 @@
       </a:lvl1pPr>
     </p:titleStyle>
     <p:bodyStyle>
-      <a:lvl1pPr marL="228600" indent="-228600" algn="l" defTabSz="914400" rtl="0" eaLnBrk="1" latinLnBrk="0" hangingPunct="1">
+      <a:lvl1pPr marL="153162" indent="-153162" algn="l" defTabSz="612648" rtl="0" eaLnBrk="1" latinLnBrk="0" hangingPunct="1">
         <a:lnSpc>
           <a:spcPct val="90000"/>
         </a:lnSpc>
         <a:spcBef>
-          <a:spcPts val="1000"/>
+          <a:spcPts val="670"/>
         </a:spcBef>
         <a:buFont typeface="Arial" panose="020B0604020202020204" pitchFamily="34" charset="0"/>
         <a:buChar char="•"/>
-        <a:defRPr sz="2800" kern="1200">
+        <a:defRPr sz="1876" kern="1200">
           <a:solidFill>
             <a:schemeClr val="tx1"/>
           </a:solidFill>
@@ -3091,16 +2722,16 @@
           <a:cs typeface="+mn-cs"/>
         </a:defRPr>
       </a:lvl1pPr>
-      <a:lvl2pPr marL="685800" indent="-228600" algn="l" defTabSz="914400" rtl="0" eaLnBrk="1" latinLnBrk="0" hangingPunct="1">
+      <a:lvl2pPr marL="459486" indent="-153162" algn="l" defTabSz="612648" rtl="0" eaLnBrk="1" latinLnBrk="0" hangingPunct="1">
         <a:lnSpc>
           <a:spcPct val="90000"/>
         </a:lnSpc>
         <a:spcBef>
-          <a:spcPts val="500"/>
+          <a:spcPts val="335"/>
         </a:spcBef>
         <a:buFont typeface="Arial" panose="020B0604020202020204" pitchFamily="34" charset="0"/>
         <a:buChar char="•"/>
-        <a:defRPr sz="2400" kern="1200">
+        <a:defRPr sz="1608" kern="1200">
           <a:solidFill>
             <a:schemeClr val="tx1"/>
           </a:solidFill>
@@ -3109,16 +2740,16 @@
           <a:cs typeface="+mn-cs"/>
         </a:defRPr>
       </a:lvl2pPr>
-      <a:lvl3pPr marL="1143000" indent="-228600" algn="l" defTabSz="914400" rtl="0" eaLnBrk="1" latinLnBrk="0" hangingPunct="1">
+      <a:lvl3pPr marL="765810" indent="-153162" algn="l" defTabSz="612648" rtl="0" eaLnBrk="1" latinLnBrk="0" hangingPunct="1">
         <a:lnSpc>
           <a:spcPct val="90000"/>
         </a:lnSpc>
         <a:spcBef>
-          <a:spcPts val="500"/>
+          <a:spcPts val="335"/>
         </a:spcBef>
         <a:buFont typeface="Arial" panose="020B0604020202020204" pitchFamily="34" charset="0"/>
         <a:buChar char="•"/>
-        <a:defRPr sz="2000" kern="1200">
+        <a:defRPr sz="1340" kern="1200">
           <a:solidFill>
             <a:schemeClr val="tx1"/>
           </a:solidFill>
@@ -3127,16 +2758,16 @@
           <a:cs typeface="+mn-cs"/>
         </a:defRPr>
       </a:lvl3pPr>
-      <a:lvl4pPr marL="1600200" indent="-228600" algn="l" defTabSz="914400" rtl="0" eaLnBrk="1" latinLnBrk="0" hangingPunct="1">
+      <a:lvl4pPr marL="1072134" indent="-153162" algn="l" defTabSz="612648" rtl="0" eaLnBrk="1" latinLnBrk="0" hangingPunct="1">
         <a:lnSpc>
           <a:spcPct val="90000"/>
         </a:lnSpc>
         <a:spcBef>
-          <a:spcPts val="500"/>
+          <a:spcPts val="335"/>
         </a:spcBef>
         <a:buFont typeface="Arial" panose="020B0604020202020204" pitchFamily="34" charset="0"/>
         <a:buChar char="•"/>
-        <a:defRPr sz="1800" kern="1200">
+        <a:defRPr sz="1206" kern="1200">
           <a:solidFill>
             <a:schemeClr val="tx1"/>
           </a:solidFill>
@@ -3145,16 +2776,16 @@
           <a:cs typeface="+mn-cs"/>
         </a:defRPr>
       </a:lvl4pPr>
-      <a:lvl5pPr marL="2057400" indent="-228600" algn="l" defTabSz="914400" rtl="0" eaLnBrk="1" latinLnBrk="0" hangingPunct="1">
+      <a:lvl5pPr marL="1378458" indent="-153162" algn="l" defTabSz="612648" rtl="0" eaLnBrk="1" latinLnBrk="0" hangingPunct="1">
         <a:lnSpc>
           <a:spcPct val="90000"/>
         </a:lnSpc>
         <a:spcBef>
-          <a:spcPts val="500"/>
+          <a:spcPts val="335"/>
         </a:spcBef>
         <a:buFont typeface="Arial" panose="020B0604020202020204" pitchFamily="34" charset="0"/>
         <a:buChar char="•"/>
-        <a:defRPr sz="1800" kern="1200">
+        <a:defRPr sz="1206" kern="1200">
           <a:solidFill>
             <a:schemeClr val="tx1"/>
           </a:solidFill>
@@ -3163,16 +2794,16 @@
           <a:cs typeface="+mn-cs"/>
         </a:defRPr>
       </a:lvl5pPr>
-      <a:lvl6pPr marL="2514600" indent="-228600" algn="l" defTabSz="914400" rtl="0" eaLnBrk="1" latinLnBrk="0" hangingPunct="1">
+      <a:lvl6pPr marL="1684782" indent="-153162" algn="l" defTabSz="612648" rtl="0" eaLnBrk="1" latinLnBrk="0" hangingPunct="1">
         <a:lnSpc>
           <a:spcPct val="90000"/>
         </a:lnSpc>
         <a:spcBef>
-          <a:spcPts val="500"/>
+          <a:spcPts val="335"/>
         </a:spcBef>
         <a:buFont typeface="Arial" panose="020B0604020202020204" pitchFamily="34" charset="0"/>
         <a:buChar char="•"/>
-        <a:defRPr sz="1800" kern="1200">
+        <a:defRPr sz="1206" kern="1200">
           <a:solidFill>
             <a:schemeClr val="tx1"/>
           </a:solidFill>
@@ -3181,16 +2812,16 @@
           <a:cs typeface="+mn-cs"/>
         </a:defRPr>
       </a:lvl6pPr>
-      <a:lvl7pPr marL="2971800" indent="-228600" algn="l" defTabSz="914400" rtl="0" eaLnBrk="1" latinLnBrk="0" hangingPunct="1">
+      <a:lvl7pPr marL="1991106" indent="-153162" algn="l" defTabSz="612648" rtl="0" eaLnBrk="1" latinLnBrk="0" hangingPunct="1">
         <a:lnSpc>
           <a:spcPct val="90000"/>
         </a:lnSpc>
         <a:spcBef>
-          <a:spcPts val="500"/>
+          <a:spcPts val="335"/>
         </a:spcBef>
         <a:buFont typeface="Arial" panose="020B0604020202020204" pitchFamily="34" charset="0"/>
         <a:buChar char="•"/>
-        <a:defRPr sz="1800" kern="1200">
+        <a:defRPr sz="1206" kern="1200">
           <a:solidFill>
             <a:schemeClr val="tx1"/>
           </a:solidFill>
@@ -3199,16 +2830,16 @@
           <a:cs typeface="+mn-cs"/>
         </a:defRPr>
       </a:lvl7pPr>
-      <a:lvl8pPr marL="3429000" indent="-228600" algn="l" defTabSz="914400" rtl="0" eaLnBrk="1" latinLnBrk="0" hangingPunct="1">
+      <a:lvl8pPr marL="2297430" indent="-153162" algn="l" defTabSz="612648" rtl="0" eaLnBrk="1" latinLnBrk="0" hangingPunct="1">
         <a:lnSpc>
           <a:spcPct val="90000"/>
         </a:lnSpc>
         <a:spcBef>
-          <a:spcPts val="500"/>
+          <a:spcPts val="335"/>
         </a:spcBef>
         <a:buFont typeface="Arial" panose="020B0604020202020204" pitchFamily="34" charset="0"/>
         <a:buChar char="•"/>
-        <a:defRPr sz="1800" kern="1200">
+        <a:defRPr sz="1206" kern="1200">
           <a:solidFill>
             <a:schemeClr val="tx1"/>
           </a:solidFill>
@@ -3217,16 +2848,16 @@
           <a:cs typeface="+mn-cs"/>
         </a:defRPr>
       </a:lvl8pPr>
-      <a:lvl9pPr marL="3886200" indent="-228600" algn="l" defTabSz="914400" rtl="0" eaLnBrk="1" latinLnBrk="0" hangingPunct="1">
+      <a:lvl9pPr marL="2603754" indent="-153162" algn="l" defTabSz="612648" rtl="0" eaLnBrk="1" latinLnBrk="0" hangingPunct="1">
         <a:lnSpc>
           <a:spcPct val="90000"/>
         </a:lnSpc>
         <a:spcBef>
-          <a:spcPts val="500"/>
+          <a:spcPts val="335"/>
         </a:spcBef>
         <a:buFont typeface="Arial" panose="020B0604020202020204" pitchFamily="34" charset="0"/>
         <a:buChar char="•"/>
-        <a:defRPr sz="1800" kern="1200">
+        <a:defRPr sz="1206" kern="1200">
           <a:solidFill>
             <a:schemeClr val="tx1"/>
           </a:solidFill>
@@ -3238,10 +2869,10 @@
     </p:bodyStyle>
     <p:otherStyle>
       <a:defPPr>
-        <a:defRPr lang="en-DE"/>
+        <a:defRPr lang="en-US"/>
       </a:defPPr>
-      <a:lvl1pPr marL="0" algn="l" defTabSz="914400" rtl="0" eaLnBrk="1" latinLnBrk="0" hangingPunct="1">
-        <a:defRPr sz="1800" kern="1200">
+      <a:lvl1pPr marL="0" algn="l" defTabSz="612648" rtl="0" eaLnBrk="1" latinLnBrk="0" hangingPunct="1">
+        <a:defRPr sz="1206" kern="1200">
           <a:solidFill>
             <a:schemeClr val="tx1"/>
           </a:solidFill>
@@ -3250,8 +2881,8 @@
           <a:cs typeface="+mn-cs"/>
         </a:defRPr>
       </a:lvl1pPr>
-      <a:lvl2pPr marL="457200" algn="l" defTabSz="914400" rtl="0" eaLnBrk="1" latinLnBrk="0" hangingPunct="1">
-        <a:defRPr sz="1800" kern="1200">
+      <a:lvl2pPr marL="306324" algn="l" defTabSz="612648" rtl="0" eaLnBrk="1" latinLnBrk="0" hangingPunct="1">
+        <a:defRPr sz="1206" kern="1200">
           <a:solidFill>
             <a:schemeClr val="tx1"/>
           </a:solidFill>
@@ -3260,8 +2891,8 @@
           <a:cs typeface="+mn-cs"/>
         </a:defRPr>
       </a:lvl2pPr>
-      <a:lvl3pPr marL="914400" algn="l" defTabSz="914400" rtl="0" eaLnBrk="1" latinLnBrk="0" hangingPunct="1">
-        <a:defRPr sz="1800" kern="1200">
+      <a:lvl3pPr marL="612648" algn="l" defTabSz="612648" rtl="0" eaLnBrk="1" latinLnBrk="0" hangingPunct="1">
+        <a:defRPr sz="1206" kern="1200">
           <a:solidFill>
             <a:schemeClr val="tx1"/>
           </a:solidFill>
@@ -3270,8 +2901,8 @@
           <a:cs typeface="+mn-cs"/>
         </a:defRPr>
       </a:lvl3pPr>
-      <a:lvl4pPr marL="1371600" algn="l" defTabSz="914400" rtl="0" eaLnBrk="1" latinLnBrk="0" hangingPunct="1">
-        <a:defRPr sz="1800" kern="1200">
+      <a:lvl4pPr marL="918972" algn="l" defTabSz="612648" rtl="0" eaLnBrk="1" latinLnBrk="0" hangingPunct="1">
+        <a:defRPr sz="1206" kern="1200">
           <a:solidFill>
             <a:schemeClr val="tx1"/>
           </a:solidFill>
@@ -3280,8 +2911,8 @@
           <a:cs typeface="+mn-cs"/>
         </a:defRPr>
       </a:lvl4pPr>
-      <a:lvl5pPr marL="1828800" algn="l" defTabSz="914400" rtl="0" eaLnBrk="1" latinLnBrk="0" hangingPunct="1">
-        <a:defRPr sz="1800" kern="1200">
+      <a:lvl5pPr marL="1225296" algn="l" defTabSz="612648" rtl="0" eaLnBrk="1" latinLnBrk="0" hangingPunct="1">
+        <a:defRPr sz="1206" kern="1200">
           <a:solidFill>
             <a:schemeClr val="tx1"/>
           </a:solidFill>
@@ -3290,8 +2921,8 @@
           <a:cs typeface="+mn-cs"/>
         </a:defRPr>
       </a:lvl5pPr>
-      <a:lvl6pPr marL="2286000" algn="l" defTabSz="914400" rtl="0" eaLnBrk="1" latinLnBrk="0" hangingPunct="1">
-        <a:defRPr sz="1800" kern="1200">
+      <a:lvl6pPr marL="1531620" algn="l" defTabSz="612648" rtl="0" eaLnBrk="1" latinLnBrk="0" hangingPunct="1">
+        <a:defRPr sz="1206" kern="1200">
           <a:solidFill>
             <a:schemeClr val="tx1"/>
           </a:solidFill>
@@ -3300,8 +2931,8 @@
           <a:cs typeface="+mn-cs"/>
         </a:defRPr>
       </a:lvl6pPr>
-      <a:lvl7pPr marL="2743200" algn="l" defTabSz="914400" rtl="0" eaLnBrk="1" latinLnBrk="0" hangingPunct="1">
-        <a:defRPr sz="1800" kern="1200">
+      <a:lvl7pPr marL="1837944" algn="l" defTabSz="612648" rtl="0" eaLnBrk="1" latinLnBrk="0" hangingPunct="1">
+        <a:defRPr sz="1206" kern="1200">
           <a:solidFill>
             <a:schemeClr val="tx1"/>
           </a:solidFill>
@@ -3310,8 +2941,8 @@
           <a:cs typeface="+mn-cs"/>
         </a:defRPr>
       </a:lvl7pPr>
-      <a:lvl8pPr marL="3200400" algn="l" defTabSz="914400" rtl="0" eaLnBrk="1" latinLnBrk="0" hangingPunct="1">
-        <a:defRPr sz="1800" kern="1200">
+      <a:lvl8pPr marL="2144268" algn="l" defTabSz="612648" rtl="0" eaLnBrk="1" latinLnBrk="0" hangingPunct="1">
+        <a:defRPr sz="1206" kern="1200">
           <a:solidFill>
             <a:schemeClr val="tx1"/>
           </a:solidFill>
@@ -3320,8 +2951,8 @@
           <a:cs typeface="+mn-cs"/>
         </a:defRPr>
       </a:lvl8pPr>
-      <a:lvl9pPr marL="3657600" algn="l" defTabSz="914400" rtl="0" eaLnBrk="1" latinLnBrk="0" hangingPunct="1">
-        <a:defRPr sz="1800" kern="1200">
+      <a:lvl9pPr marL="2450592" algn="l" defTabSz="612648" rtl="0" eaLnBrk="1" latinLnBrk="0" hangingPunct="1">
+        <a:defRPr sz="1206" kern="1200">
           <a:solidFill>
             <a:schemeClr val="tx1"/>
           </a:solidFill>
@@ -3374,7 +3005,7 @@
         </p:blipFill>
         <p:spPr>
           <a:xfrm>
-            <a:off x="3010285" y="962333"/>
+            <a:off x="-22630" y="1904"/>
             <a:ext cx="6171429" cy="4933333"/>
           </a:xfrm>
           <a:prstGeom prst="rect">
@@ -3392,6 +3023,18 @@
   <p:clrMapOvr>
     <a:masterClrMapping/>
   </p:clrMapOvr>
+  <mc:AlternateContent xmlns:mc="http://schemas.openxmlformats.org/markup-compatibility/2006">
+    <mc:Choice xmlns:p14="http://schemas.microsoft.com/office/powerpoint/2010/main" Requires="p14">
+      <p:transition spd="med" p14:dur="700">
+        <p:fade/>
+      </p:transition>
+    </mc:Choice>
+    <mc:Fallback>
+      <p:transition spd="med">
+        <p:fade/>
+      </p:transition>
+    </mc:Fallback>
+  </mc:AlternateContent>
 </p:sld>
 </file>
 
@@ -3434,7 +3077,7 @@
         </p:blipFill>
         <p:spPr>
           <a:xfrm>
-            <a:off x="3010285" y="962333"/>
+            <a:off x="-22630" y="1904"/>
             <a:ext cx="6171429" cy="4933333"/>
           </a:xfrm>
           <a:prstGeom prst="rect">
@@ -3452,6 +3095,18 @@
   <p:clrMapOvr>
     <a:masterClrMapping/>
   </p:clrMapOvr>
+  <mc:AlternateContent xmlns:mc="http://schemas.openxmlformats.org/markup-compatibility/2006">
+    <mc:Choice xmlns:p14="http://schemas.microsoft.com/office/powerpoint/2010/main" Requires="p14">
+      <p:transition spd="med" p14:dur="700">
+        <p:fade/>
+      </p:transition>
+    </mc:Choice>
+    <mc:Fallback>
+      <p:transition spd="med">
+        <p:fade/>
+      </p:transition>
+    </mc:Fallback>
+  </mc:AlternateContent>
 </p:sld>
 </file>
 
@@ -3500,7 +3155,7 @@
         </p:blipFill>
         <p:spPr>
           <a:xfrm>
-            <a:off x="3010285" y="962333"/>
+            <a:off x="-22630" y="1904"/>
             <a:ext cx="6171429" cy="4933333"/>
           </a:xfrm>
           <a:prstGeom prst="rect">
@@ -3518,6 +3173,18 @@
   <p:clrMapOvr>
     <a:masterClrMapping/>
   </p:clrMapOvr>
+  <mc:AlternateContent xmlns:mc="http://schemas.openxmlformats.org/markup-compatibility/2006">
+    <mc:Choice xmlns:p14="http://schemas.microsoft.com/office/powerpoint/2010/main" Requires="p14">
+      <p:transition spd="med" p14:dur="700">
+        <p:fade/>
+      </p:transition>
+    </mc:Choice>
+    <mc:Fallback>
+      <p:transition spd="med">
+        <p:fade/>
+      </p:transition>
+    </mc:Fallback>
+  </mc:AlternateContent>
 </p:sld>
 </file>
 
@@ -3560,7 +3227,7 @@
         </p:blipFill>
         <p:spPr>
           <a:xfrm>
-            <a:off x="3010285" y="962333"/>
+            <a:off x="-22630" y="1904"/>
             <a:ext cx="6171429" cy="4933333"/>
           </a:xfrm>
           <a:prstGeom prst="rect">
@@ -3578,6 +3245,18 @@
   <p:clrMapOvr>
     <a:masterClrMapping/>
   </p:clrMapOvr>
+  <mc:AlternateContent xmlns:mc="http://schemas.openxmlformats.org/markup-compatibility/2006">
+    <mc:Choice xmlns:p14="http://schemas.microsoft.com/office/powerpoint/2010/main" Requires="p14">
+      <p:transition spd="med" p14:dur="700">
+        <p:fade/>
+      </p:transition>
+    </mc:Choice>
+    <mc:Fallback>
+      <p:transition spd="med">
+        <p:fade/>
+      </p:transition>
+    </mc:Fallback>
+  </mc:AlternateContent>
 </p:sld>
 </file>
 
@@ -3620,7 +3299,7 @@
         </p:blipFill>
         <p:spPr>
           <a:xfrm>
-            <a:off x="3010285" y="962333"/>
+            <a:off x="-22630" y="1904"/>
             <a:ext cx="6171429" cy="4933333"/>
           </a:xfrm>
           <a:prstGeom prst="rect">
@@ -3638,6 +3317,18 @@
   <p:clrMapOvr>
     <a:masterClrMapping/>
   </p:clrMapOvr>
+  <mc:AlternateContent xmlns:mc="http://schemas.openxmlformats.org/markup-compatibility/2006">
+    <mc:Choice xmlns:p14="http://schemas.microsoft.com/office/powerpoint/2010/main" Requires="p14">
+      <p:transition spd="med" p14:dur="700">
+        <p:fade/>
+      </p:transition>
+    </mc:Choice>
+    <mc:Fallback>
+      <p:transition spd="med">
+        <p:fade/>
+      </p:transition>
+    </mc:Fallback>
+  </mc:AlternateContent>
 </p:sld>
 </file>
 
@@ -3680,7 +3371,7 @@
         </p:blipFill>
         <p:spPr>
           <a:xfrm>
-            <a:off x="3010285" y="962333"/>
+            <a:off x="-22630" y="1904"/>
             <a:ext cx="6171429" cy="4933333"/>
           </a:xfrm>
           <a:prstGeom prst="rect">
@@ -3698,6 +3389,18 @@
   <p:clrMapOvr>
     <a:masterClrMapping/>
   </p:clrMapOvr>
+  <mc:AlternateContent xmlns:mc="http://schemas.openxmlformats.org/markup-compatibility/2006">
+    <mc:Choice xmlns:p14="http://schemas.microsoft.com/office/powerpoint/2010/main" Requires="p14">
+      <p:transition spd="med" p14:dur="700">
+        <p:fade/>
+      </p:transition>
+    </mc:Choice>
+    <mc:Fallback>
+      <p:transition spd="med">
+        <p:fade/>
+      </p:transition>
+    </mc:Fallback>
+  </mc:AlternateContent>
 </p:sld>
 </file>
 
@@ -3740,7 +3443,7 @@
         </p:blipFill>
         <p:spPr>
           <a:xfrm>
-            <a:off x="3010285" y="962333"/>
+            <a:off x="-22630" y="1904"/>
             <a:ext cx="6171429" cy="4933333"/>
           </a:xfrm>
           <a:prstGeom prst="rect">
@@ -3758,6 +3461,18 @@
   <p:clrMapOvr>
     <a:masterClrMapping/>
   </p:clrMapOvr>
+  <mc:AlternateContent xmlns:mc="http://schemas.openxmlformats.org/markup-compatibility/2006">
+    <mc:Choice xmlns:p14="http://schemas.microsoft.com/office/powerpoint/2010/main" Requires="p14">
+      <p:transition spd="med" p14:dur="700">
+        <p:fade/>
+      </p:transition>
+    </mc:Choice>
+    <mc:Fallback>
+      <p:transition spd="med">
+        <p:fade/>
+      </p:transition>
+    </mc:Fallback>
+  </mc:AlternateContent>
 </p:sld>
 </file>
 
@@ -3800,7 +3515,7 @@
         </p:blipFill>
         <p:spPr>
           <a:xfrm>
-            <a:off x="3010285" y="962333"/>
+            <a:off x="-22630" y="1904"/>
             <a:ext cx="6171429" cy="4933333"/>
           </a:xfrm>
           <a:prstGeom prst="rect">
@@ -3818,6 +3533,18 @@
   <p:clrMapOvr>
     <a:masterClrMapping/>
   </p:clrMapOvr>
+  <mc:AlternateContent xmlns:mc="http://schemas.openxmlformats.org/markup-compatibility/2006">
+    <mc:Choice xmlns:p14="http://schemas.microsoft.com/office/powerpoint/2010/main" Requires="p14">
+      <p:transition spd="med" p14:dur="700">
+        <p:fade/>
+      </p:transition>
+    </mc:Choice>
+    <mc:Fallback>
+      <p:transition spd="med">
+        <p:fade/>
+      </p:transition>
+    </mc:Fallback>
+  </mc:AlternateContent>
 </p:sld>
 </file>
 
@@ -3860,7 +3587,7 @@
         </p:blipFill>
         <p:spPr>
           <a:xfrm>
-            <a:off x="3010285" y="962333"/>
+            <a:off x="-22630" y="1904"/>
             <a:ext cx="6171429" cy="4933333"/>
           </a:xfrm>
           <a:prstGeom prst="rect">
@@ -3878,6 +3605,18 @@
   <p:clrMapOvr>
     <a:masterClrMapping/>
   </p:clrMapOvr>
+  <mc:AlternateContent xmlns:mc="http://schemas.openxmlformats.org/markup-compatibility/2006">
+    <mc:Choice xmlns:p14="http://schemas.microsoft.com/office/powerpoint/2010/main" Requires="p14">
+      <p:transition spd="med" p14:dur="700">
+        <p:fade/>
+      </p:transition>
+    </mc:Choice>
+    <mc:Fallback>
+      <p:transition spd="med">
+        <p:fade/>
+      </p:transition>
+    </mc:Fallback>
+  </mc:AlternateContent>
 </p:sld>
 </file>
 
@@ -3920,7 +3659,7 @@
         </p:blipFill>
         <p:spPr>
           <a:xfrm>
-            <a:off x="3010285" y="962333"/>
+            <a:off x="-22630" y="1904"/>
             <a:ext cx="6171429" cy="4933333"/>
           </a:xfrm>
           <a:prstGeom prst="rect">
@@ -3938,6 +3677,18 @@
   <p:clrMapOvr>
     <a:masterClrMapping/>
   </p:clrMapOvr>
+  <mc:AlternateContent xmlns:mc="http://schemas.openxmlformats.org/markup-compatibility/2006">
+    <mc:Choice xmlns:p14="http://schemas.microsoft.com/office/powerpoint/2010/main" Requires="p14">
+      <p:transition spd="med" p14:dur="700">
+        <p:fade/>
+      </p:transition>
+    </mc:Choice>
+    <mc:Fallback>
+      <p:transition spd="med">
+        <p:fade/>
+      </p:transition>
+    </mc:Fallback>
+  </mc:AlternateContent>
 </p:sld>
 </file>
 
@@ -3980,7 +3731,7 @@
         </p:blipFill>
         <p:spPr>
           <a:xfrm>
-            <a:off x="3010285" y="962333"/>
+            <a:off x="-22630" y="1904"/>
             <a:ext cx="6171429" cy="4933333"/>
           </a:xfrm>
           <a:prstGeom prst="rect">
@@ -3998,13 +3749,25 @@
   <p:clrMapOvr>
     <a:masterClrMapping/>
   </p:clrMapOvr>
+  <mc:AlternateContent xmlns:mc="http://schemas.openxmlformats.org/markup-compatibility/2006">
+    <mc:Choice xmlns:p14="http://schemas.microsoft.com/office/powerpoint/2010/main" Requires="p14">
+      <p:transition spd="med" p14:dur="700">
+        <p:fade/>
+      </p:transition>
+    </mc:Choice>
+    <mc:Fallback>
+      <p:transition spd="med">
+        <p:fade/>
+      </p:transition>
+    </mc:Fallback>
+  </mc:AlternateContent>
 </p:sld>
 </file>
 
 <file path=ppt/theme/theme1.xml><?xml version="1.0" encoding="utf-8"?>
 <a:theme xmlns:a="http://schemas.openxmlformats.org/drawingml/2006/main" name="Office Theme">
   <a:themeElements>
-    <a:clrScheme name="Office">
+    <a:clrScheme name="Office Theme">
       <a:dk1>
         <a:sysClr val="windowText" lastClr="000000"/>
       </a:dk1>
@@ -4042,7 +3805,7 @@
         <a:srgbClr val="96607D"/>
       </a:folHlink>
     </a:clrScheme>
-    <a:fontScheme name="Office">
+    <a:fontScheme name="Office Theme">
       <a:majorFont>
         <a:latin typeface="Aptos Display" panose="02110004020202020204"/>
         <a:ea typeface=""/>
@@ -4148,7 +3911,7 @@
         <a:font script="Tfng" typeface="Ebrima"/>
       </a:minorFont>
     </a:fontScheme>
-    <a:fmtScheme name="Office">
+    <a:fmtScheme name="Office Theme">
       <a:fillStyleLst>
         <a:solidFill>
           <a:schemeClr val="phClr"/>
